--- a/docs/slides/LawFirm_Presentation_Backup.pptx
+++ b/docs/slides/LawFirm_Presentation_Backup.pptx
@@ -12,6 +12,7 @@
     <p:sldId id="270" r:id="rId22"/>
     <p:sldId id="271" r:id="rId23"/>
     <p:sldId id="272" r:id="rId24"/>
+    <p:sldId id="275" r:id="rId27"/>
   </p:sldIdLst>
   <p:sldSz cx="12192000" cy="6858000" type="screen4x3"/>
   <p:notesSz cx="6858000" cy="9144000"/>
@@ -789,6 +790,76 @@
           <a:p>
             <a:r>
               <a:t>สไลด์สำรองสำหรับตอบคำถาม เปิดเฉพาะเมื่อถูกถาม ถ้าถามว่า _status ยังเขียนทับได้ไหม ตอบตรงๆ ว่าได้ เพราะ Python ไม่มี private จริง ขีดล่างหนึ่งตัวเป็นข้อตกลงว่าห้ามแตะ สิ่งที่กันจริงคือ property ที่ไม่มี setter ถ้าต้องการกันมากขึ้นใช้ขีดล่างสองตัวให้เกิด name mangling ได้ ถ้าถามว่าทำไมไม่มี interface ตอบว่า Python ไม่มีคีย์เวิร์ด interface ใช้ ABC กับ abstractmethod ทำหน้าที่เดียวกัน ถ้าถามเรื่อง overloading ตอบว่า Python ไม่มี method overloading แบบ Java ระบบนี้ใช้ overriding แทน และถ้าถามเรื่อง composition กับ aggregation Case ถือ CaseAssignment ไว้เป็นของตัวเองคือ composition ส่วน Schedule แค่ยืมรายการนัดมาตรวจ ไม่ได้เป็นเจ้าของ คือ aggregation ครับ</a:t>
+            </a:r>
+          </a:p>
+        </p:txBody>
+      </p:sp>
+      <p:sp>
+        <p:nvSpPr>
+          <p:cNvPr id="4" name="Slide Number Placeholder 3"/>
+          <p:cNvSpPr>
+            <a:spLocks noGrp="1"/>
+          </p:cNvSpPr>
+          <p:nvPr>
+            <p:ph type="sldNum" idx="5" sz="quarter"/>
+          </p:nvPr>
+        </p:nvSpPr>
+        <p:spPr/>
+      </p:sp>
+    </p:spTree>
+  </p:cSld>
+  <p:clrMapOvr>
+    <a:masterClrMapping/>
+  </p:clrMapOvr>
+</p:notes>
+</file>
+
+<file path=ppt/notesSlides/notesSlide20.xml><?xml version="1.0" encoding="utf-8"?>
+<p:notes xmlns:a="http://schemas.openxmlformats.org/drawingml/2006/main" xmlns:p="http://schemas.openxmlformats.org/presentationml/2006/main" xmlns:r="http://schemas.openxmlformats.org/officeDocument/2006/relationships">
+  <p:cSld>
+    <p:spTree>
+      <p:nvGrpSpPr>
+        <p:cNvPr id="1" name=""/>
+        <p:cNvGrpSpPr/>
+        <p:nvPr/>
+      </p:nvGrpSpPr>
+      <p:grpSpPr>
+        <a:xfrm>
+          <a:off x="0" y="0"/>
+          <a:ext cx="0" cy="0"/>
+          <a:chOff x="0" y="0"/>
+          <a:chExt cx="0" cy="0"/>
+        </a:xfrm>
+      </p:grpSpPr>
+      <p:sp>
+        <p:nvSpPr>
+          <p:cNvPr id="2" name="Slide Image Placeholder 1"/>
+          <p:cNvSpPr>
+            <a:spLocks noGrp="1"/>
+          </p:cNvSpPr>
+          <p:nvPr>
+            <p:ph type="sldImg" idx="2"/>
+          </p:nvPr>
+        </p:nvSpPr>
+        <p:spPr/>
+      </p:sp>
+      <p:sp>
+        <p:nvSpPr>
+          <p:cNvPr id="3" name="Notes Placeholder 2"/>
+          <p:cNvSpPr>
+            <a:spLocks noGrp="1"/>
+          </p:cNvSpPr>
+          <p:nvPr>
+            <p:ph type="body" idx="3" sz="quarter"/>
+          </p:nvPr>
+        </p:nvSpPr>
+        <p:spPr/>
+        <p:txBody>
+          <a:bodyPr/>
+          <a:lstStyle/>
+          <a:p>
+            <a:r>
+              <a:t>ฝั่งคดีและตาราง ตรงกลางคือ Case เก็บสถานะและรายการมอบหมายไว้เป็น private คดีหนึ่งมี CaseAssignment ได้หลายรายการ แต่ละรายการผูกกับทนายหนึ่งคน ซ้ายล่างคือ Appointment เป็นคลาส abstract มีลูกสามชนิด นัดศาล นัดพบลูกความ และกำหนดยื่นเอกสาร นัดศาลเตือนล่วงหน้า 3 วัน นัดพบลูกความ 1 วัน กำหนดยื่น 15 วัน ตัวเลขต่างกันแต่เรียกเมธอดเดียวกัน ขวามือคือ Schedule ไม่ได้สร้างนัดเอง แค่ยืมรายการนัดจาก repository มาตรวจนัดชน เป็นความสัมพันธ์แบบ aggregation และทุกคลาสใน domain เขียนเป็น dataclass ส่วนสถานะคดีกับสถานะการมอบหมายเป็น enum ครับ</a:t>
             </a:r>
           </a:p>
         </p:txBody>
@@ -9941,6 +10012,1733 @@
                 <a:cs typeface="Sarabun"/>
               </a:rPr>
               <a:t>อ้างอิง: README.md §บัญชีตัวอย่าง · seed มี lawyer1 ถึง lawyer8 · manager1 · admin</a:t>
+            </a:r>
+          </a:p>
+        </p:txBody>
+      </p:sp>
+    </p:spTree>
+  </p:cSld>
+  <p:clrMapOvr>
+    <a:masterClrMapping/>
+  </p:clrMapOvr>
+</p:sld>
+</file>
+
+<file path=ppt/slides/slide20.xml><?xml version="1.0" encoding="utf-8"?>
+<p:sld xmlns:a="http://schemas.openxmlformats.org/drawingml/2006/main" xmlns:p="http://schemas.openxmlformats.org/presentationml/2006/main" xmlns:r="http://schemas.openxmlformats.org/officeDocument/2006/relationships">
+  <p:cSld>
+    <p:bg>
+      <p:bgPr>
+        <a:solidFill>
+          <a:srgbClr val="1E1E1E"/>
+        </a:solidFill>
+        <a:effectLst/>
+      </p:bgPr>
+    </p:bg>
+    <p:spTree>
+      <p:nvGrpSpPr>
+        <p:cNvPr id="1" name=""/>
+        <p:cNvGrpSpPr/>
+        <p:nvPr/>
+      </p:nvGrpSpPr>
+      <p:grpSpPr/>
+      <p:sp>
+        <p:nvSpPr>
+          <p:cNvPr id="2" name="TextBox 1"/>
+          <p:cNvSpPr txBox="1"/>
+          <p:nvPr/>
+        </p:nvSpPr>
+        <p:spPr>
+          <a:xfrm>
+            <a:off x="508000" y="330200"/>
+            <a:ext cx="10414000" cy="558800"/>
+          </a:xfrm>
+          <a:prstGeom prst="rect">
+            <a:avLst/>
+          </a:prstGeom>
+          <a:noFill/>
+        </p:spPr>
+        <p:txBody>
+          <a:bodyPr wrap="square" anchor="t" lIns="50800" rIns="50800" tIns="25400" bIns="25400">
+            <a:spAutoFit/>
+          </a:bodyPr>
+          <a:lstStyle/>
+          <a:p>
+            <a:pPr algn="l">
+              <a:spcAft>
+                <a:spcPts val="600"/>
+              </a:spcAft>
+            </a:pPr>
+            <a:r>
+              <a:rPr sz="2800" b="1">
+                <a:solidFill>
+                  <a:srgbClr val="FFFFFF"/>
+                </a:solidFill>
+                <a:latin typeface="Sarabun"/>
+                <a:ea typeface="Sarabun"/>
+                <a:cs typeface="Sarabun"/>
+              </a:rPr>
+              <a:t>Case เป็นศูนย์กลาง ถือการมอบหมาย นัด และโน้ต (ฉบับเต็ม)</a:t>
+            </a:r>
+          </a:p>
+        </p:txBody>
+      </p:sp>
+      <p:sp>
+        <p:nvSpPr>
+          <p:cNvPr id="3" name="TextBox 2"/>
+          <p:cNvSpPr txBox="1"/>
+          <p:nvPr/>
+        </p:nvSpPr>
+        <p:spPr>
+          <a:xfrm>
+            <a:off x="508000" y="863600"/>
+            <a:ext cx="10922000" cy="330200"/>
+          </a:xfrm>
+          <a:prstGeom prst="rect">
+            <a:avLst/>
+          </a:prstGeom>
+          <a:noFill/>
+        </p:spPr>
+        <p:txBody>
+          <a:bodyPr wrap="square" anchor="t" lIns="50800" rIns="50800" tIns="25400" bIns="25400">
+            <a:spAutoFit/>
+          </a:bodyPr>
+          <a:lstStyle/>
+          <a:p>
+            <a:pPr algn="l">
+              <a:spcAft>
+                <a:spcPts val="600"/>
+              </a:spcAft>
+            </a:pPr>
+            <a:r>
+              <a:rPr sz="1500" b="0">
+                <a:solidFill>
+                  <a:srgbClr val="A6A6A6"/>
+                </a:solidFill>
+                <a:latin typeface="Sarabun"/>
+                <a:ea typeface="Sarabun"/>
+                <a:cs typeface="Sarabun"/>
+              </a:rPr>
+              <a:t>CLASS DIAGRAM ฉบับเต็ม · สำรอง</a:t>
+            </a:r>
+          </a:p>
+        </p:txBody>
+      </p:sp>
+      <p:sp>
+        <p:nvSpPr>
+          <p:cNvPr id="4" name="Rectangle 3"/>
+          <p:cNvSpPr/>
+          <p:nvPr/>
+        </p:nvSpPr>
+        <p:spPr>
+          <a:xfrm>
+            <a:off x="508000" y="1295400"/>
+            <a:ext cx="11176000" cy="19050"/>
+          </a:xfrm>
+          <a:prstGeom prst="rect">
+            <a:avLst/>
+          </a:prstGeom>
+          <a:solidFill>
+            <a:srgbClr val="444444"/>
+          </a:solidFill>
+          <a:ln>
+            <a:noFill/>
+          </a:ln>
+          <a:effectLst/>
+        </p:spPr>
+        <p:style>
+          <a:lnRef idx="1">
+            <a:schemeClr val="accent1"/>
+          </a:lnRef>
+          <a:fillRef idx="3">
+            <a:schemeClr val="accent1"/>
+          </a:fillRef>
+          <a:effectRef idx="2">
+            <a:schemeClr val="accent1"/>
+          </a:effectRef>
+          <a:fontRef idx="minor">
+            <a:schemeClr val="lt1"/>
+          </a:fontRef>
+        </p:style>
+        <p:txBody>
+          <a:bodyPr rtlCol="0" anchor="ctr"/>
+          <a:lstStyle/>
+          <a:p>
+            <a:pPr algn="ctr"/>
+          </a:p>
+        </p:txBody>
+      </p:sp>
+      <p:sp>
+        <p:nvSpPr>
+          <p:cNvPr id="5" name="Rectangle 4"/>
+          <p:cNvSpPr/>
+          <p:nvPr/>
+        </p:nvSpPr>
+        <p:spPr>
+          <a:xfrm>
+            <a:off x="508000" y="1282700"/>
+            <a:ext cx="1016000" cy="38100"/>
+          </a:xfrm>
+          <a:prstGeom prst="rect">
+            <a:avLst/>
+          </a:prstGeom>
+          <a:solidFill>
+            <a:srgbClr val="B39DDB"/>
+          </a:solidFill>
+          <a:ln>
+            <a:noFill/>
+          </a:ln>
+          <a:effectLst/>
+        </p:spPr>
+        <p:style>
+          <a:lnRef idx="1">
+            <a:schemeClr val="accent1"/>
+          </a:lnRef>
+          <a:fillRef idx="3">
+            <a:schemeClr val="accent1"/>
+          </a:fillRef>
+          <a:effectRef idx="2">
+            <a:schemeClr val="accent1"/>
+          </a:effectRef>
+          <a:fontRef idx="minor">
+            <a:schemeClr val="lt1"/>
+          </a:fontRef>
+        </p:style>
+        <p:txBody>
+          <a:bodyPr rtlCol="0" anchor="ctr"/>
+          <a:lstStyle/>
+          <a:p>
+            <a:pPr algn="ctr"/>
+          </a:p>
+        </p:txBody>
+      </p:sp>
+      <p:sp>
+        <p:nvSpPr>
+          <p:cNvPr id="6" name="TextBox 5"/>
+          <p:cNvSpPr txBox="1"/>
+          <p:nvPr/>
+        </p:nvSpPr>
+        <p:spPr>
+          <a:xfrm>
+            <a:off x="10922000" y="355600"/>
+            <a:ext cx="762000" cy="381000"/>
+          </a:xfrm>
+          <a:prstGeom prst="rect">
+            <a:avLst/>
+          </a:prstGeom>
+          <a:noFill/>
+        </p:spPr>
+        <p:txBody>
+          <a:bodyPr wrap="square" anchor="t" lIns="50800" rIns="50800" tIns="25400" bIns="25400">
+            <a:spAutoFit/>
+          </a:bodyPr>
+          <a:lstStyle/>
+          <a:p>
+            <a:pPr algn="r">
+              <a:spcAft>
+                <a:spcPts val="600"/>
+              </a:spcAft>
+            </a:pPr>
+            <a:r>
+              <a:rPr sz="1400" b="0">
+                <a:solidFill>
+                  <a:srgbClr val="A6A6A6"/>
+                </a:solidFill>
+                <a:latin typeface="Sarabun"/>
+                <a:ea typeface="Sarabun"/>
+                <a:cs typeface="Sarabun"/>
+              </a:rPr>
+              <a:t>B7</a:t>
+            </a:r>
+          </a:p>
+        </p:txBody>
+      </p:sp>
+      <p:sp>
+        <p:nvSpPr>
+          <p:cNvPr id="7" name="Rectangle 6"/>
+          <p:cNvSpPr/>
+          <p:nvPr/>
+        </p:nvSpPr>
+        <p:spPr>
+          <a:xfrm>
+            <a:off x="508000" y="1498600"/>
+            <a:ext cx="3429000" cy="1066800"/>
+          </a:xfrm>
+          <a:prstGeom prst="rect">
+            <a:avLst/>
+          </a:prstGeom>
+          <a:solidFill>
+            <a:srgbClr val="2B2B2B"/>
+          </a:solidFill>
+          <a:ln w="15875">
+            <a:solidFill>
+              <a:srgbClr val="444444"/>
+            </a:solidFill>
+          </a:ln>
+          <a:effectLst/>
+        </p:spPr>
+        <p:style>
+          <a:lnRef idx="1">
+            <a:schemeClr val="accent1"/>
+          </a:lnRef>
+          <a:fillRef idx="3">
+            <a:schemeClr val="accent1"/>
+          </a:fillRef>
+          <a:effectRef idx="2">
+            <a:schemeClr val="accent1"/>
+          </a:effectRef>
+          <a:fontRef idx="minor">
+            <a:schemeClr val="lt1"/>
+          </a:fontRef>
+        </p:style>
+        <p:txBody>
+          <a:bodyPr rtlCol="0" anchor="ctr"/>
+          <a:lstStyle/>
+          <a:p>
+            <a:pPr algn="ctr"/>
+          </a:p>
+        </p:txBody>
+      </p:sp>
+      <p:sp>
+        <p:nvSpPr>
+          <p:cNvPr id="8" name="TextBox 7"/>
+          <p:cNvSpPr txBox="1"/>
+          <p:nvPr/>
+        </p:nvSpPr>
+        <p:spPr>
+          <a:xfrm>
+            <a:off x="558800" y="1549400"/>
+            <a:ext cx="3327400" cy="965200"/>
+          </a:xfrm>
+          <a:prstGeom prst="rect">
+            <a:avLst/>
+          </a:prstGeom>
+          <a:noFill/>
+        </p:spPr>
+        <p:txBody>
+          <a:bodyPr wrap="square" anchor="ctr" lIns="50800" rIns="50800" tIns="25400" bIns="25400">
+            <a:spAutoFit/>
+          </a:bodyPr>
+          <a:lstStyle/>
+          <a:p>
+            <a:pPr algn="ctr">
+              <a:spcAft>
+                <a:spcPts val="100"/>
+              </a:spcAft>
+            </a:pPr>
+            <a:r>
+              <a:rPr sz="1400" b="1">
+                <a:solidFill>
+                  <a:srgbClr val="FFFFFF"/>
+                </a:solidFill>
+                <a:latin typeface="Sarabun"/>
+                <a:ea typeface="Sarabun"/>
+                <a:cs typeface="Sarabun"/>
+              </a:rPr>
+              <a:t>CaseAssignment (−status)</a:t>
+            </a:r>
+          </a:p>
+          <a:p>
+            <a:pPr algn="ctr">
+              <a:spcAft>
+                <a:spcPts val="100"/>
+              </a:spcAft>
+            </a:pPr>
+            <a:r>
+              <a:rPr sz="1200" b="0">
+                <a:solidFill>
+                  <a:srgbClr val="FFFFFF"/>
+                </a:solidFill>
+                <a:latin typeface="Sarabun"/>
+                <a:ea typeface="Sarabun"/>
+                <a:cs typeface="Sarabun"/>
+              </a:rPr>
+              <a:t>accept() · decline()</a:t>
+            </a:r>
+          </a:p>
+          <a:p>
+            <a:pPr algn="ctr">
+              <a:spcAft>
+                <a:spcPts val="100"/>
+              </a:spcAft>
+            </a:pPr>
+            <a:r>
+              <a:rPr sz="1200" b="0">
+                <a:solidFill>
+                  <a:srgbClr val="FFFFFF"/>
+                </a:solidFill>
+                <a:latin typeface="Sarabun"/>
+                <a:ea typeface="Sarabun"/>
+                <a:cs typeface="Sarabun"/>
+              </a:rPr>
+              <a:t>request_withdraw() · approve/reject()</a:t>
+            </a:r>
+          </a:p>
+        </p:txBody>
+      </p:sp>
+      <p:sp>
+        <p:nvSpPr>
+          <p:cNvPr id="9" name="Rectangle 8"/>
+          <p:cNvSpPr/>
+          <p:nvPr/>
+        </p:nvSpPr>
+        <p:spPr>
+          <a:xfrm>
+            <a:off x="4318000" y="1498600"/>
+            <a:ext cx="3556000" cy="1066800"/>
+          </a:xfrm>
+          <a:prstGeom prst="rect">
+            <a:avLst/>
+          </a:prstGeom>
+          <a:solidFill>
+            <a:srgbClr val="362D4A"/>
+          </a:solidFill>
+          <a:ln w="15875">
+            <a:solidFill>
+              <a:srgbClr val="B39DDB"/>
+            </a:solidFill>
+          </a:ln>
+          <a:effectLst/>
+        </p:spPr>
+        <p:style>
+          <a:lnRef idx="1">
+            <a:schemeClr val="accent1"/>
+          </a:lnRef>
+          <a:fillRef idx="3">
+            <a:schemeClr val="accent1"/>
+          </a:fillRef>
+          <a:effectRef idx="2">
+            <a:schemeClr val="accent1"/>
+          </a:effectRef>
+          <a:fontRef idx="minor">
+            <a:schemeClr val="lt1"/>
+          </a:fontRef>
+        </p:style>
+        <p:txBody>
+          <a:bodyPr rtlCol="0" anchor="ctr"/>
+          <a:lstStyle/>
+          <a:p>
+            <a:pPr algn="ctr"/>
+          </a:p>
+        </p:txBody>
+      </p:sp>
+      <p:sp>
+        <p:nvSpPr>
+          <p:cNvPr id="10" name="TextBox 9"/>
+          <p:cNvSpPr txBox="1"/>
+          <p:nvPr/>
+        </p:nvSpPr>
+        <p:spPr>
+          <a:xfrm>
+            <a:off x="4368800" y="1549400"/>
+            <a:ext cx="3454400" cy="965200"/>
+          </a:xfrm>
+          <a:prstGeom prst="rect">
+            <a:avLst/>
+          </a:prstGeom>
+          <a:noFill/>
+        </p:spPr>
+        <p:txBody>
+          <a:bodyPr wrap="square" anchor="ctr" lIns="50800" rIns="50800" tIns="25400" bIns="25400">
+            <a:spAutoFit/>
+          </a:bodyPr>
+          <a:lstStyle/>
+          <a:p>
+            <a:pPr algn="ctr">
+              <a:spcAft>
+                <a:spcPts val="100"/>
+              </a:spcAft>
+            </a:pPr>
+            <a:r>
+              <a:rPr sz="1400" b="1">
+                <a:solidFill>
+                  <a:srgbClr val="FFFFFF"/>
+                </a:solidFill>
+                <a:latin typeface="Sarabun"/>
+                <a:ea typeface="Sarabun"/>
+                <a:cs typeface="Sarabun"/>
+              </a:rPr>
+              <a:t>Case (−status, −assignments)</a:t>
+            </a:r>
+          </a:p>
+          <a:p>
+            <a:pPr algn="ctr">
+              <a:spcAft>
+                <a:spcPts val="100"/>
+              </a:spcAft>
+            </a:pPr>
+            <a:r>
+              <a:rPr sz="1200" b="0">
+                <a:solidFill>
+                  <a:srgbClr val="FFFFFF"/>
+                </a:solidFill>
+                <a:latin typeface="Sarabun"/>
+                <a:ea typeface="Sarabun"/>
+                <a:cs typeface="Sarabun"/>
+              </a:rPr>
+              <a:t>assign_lawyer() · advance_status()</a:t>
+            </a:r>
+          </a:p>
+          <a:p>
+            <a:pPr algn="ctr">
+              <a:spcAft>
+                <a:spcPts val="100"/>
+              </a:spcAft>
+            </a:pPr>
+            <a:r>
+              <a:rPr sz="1200" b="0">
+                <a:solidFill>
+                  <a:srgbClr val="FFFFFF"/>
+                </a:solidFill>
+                <a:latin typeface="Sarabun"/>
+                <a:ea typeface="Sarabun"/>
+                <a:cs typeface="Sarabun"/>
+              </a:rPr>
+              <a:t>lawyers() · lead_lawyer() · can_close()</a:t>
+            </a:r>
+          </a:p>
+        </p:txBody>
+      </p:sp>
+      <p:sp>
+        <p:nvSpPr>
+          <p:cNvPr id="11" name="Rectangle 10"/>
+          <p:cNvSpPr/>
+          <p:nvPr/>
+        </p:nvSpPr>
+        <p:spPr>
+          <a:xfrm>
+            <a:off x="8255000" y="1498600"/>
+            <a:ext cx="3429000" cy="1066800"/>
+          </a:xfrm>
+          <a:prstGeom prst="rect">
+            <a:avLst/>
+          </a:prstGeom>
+          <a:solidFill>
+            <a:srgbClr val="2B2B2B"/>
+          </a:solidFill>
+          <a:ln w="15875">
+            <a:solidFill>
+              <a:srgbClr val="444444"/>
+            </a:solidFill>
+          </a:ln>
+          <a:effectLst/>
+        </p:spPr>
+        <p:style>
+          <a:lnRef idx="1">
+            <a:schemeClr val="accent1"/>
+          </a:lnRef>
+          <a:fillRef idx="3">
+            <a:schemeClr val="accent1"/>
+          </a:fillRef>
+          <a:effectRef idx="2">
+            <a:schemeClr val="accent1"/>
+          </a:effectRef>
+          <a:fontRef idx="minor">
+            <a:schemeClr val="lt1"/>
+          </a:fontRef>
+        </p:style>
+        <p:txBody>
+          <a:bodyPr rtlCol="0" anchor="ctr"/>
+          <a:lstStyle/>
+          <a:p>
+            <a:pPr algn="ctr"/>
+          </a:p>
+        </p:txBody>
+      </p:sp>
+      <p:sp>
+        <p:nvSpPr>
+          <p:cNvPr id="12" name="TextBox 11"/>
+          <p:cNvSpPr txBox="1"/>
+          <p:nvPr/>
+        </p:nvSpPr>
+        <p:spPr>
+          <a:xfrm>
+            <a:off x="8305800" y="1549400"/>
+            <a:ext cx="3327400" cy="965200"/>
+          </a:xfrm>
+          <a:prstGeom prst="rect">
+            <a:avLst/>
+          </a:prstGeom>
+          <a:noFill/>
+        </p:spPr>
+        <p:txBody>
+          <a:bodyPr wrap="square" anchor="ctr" lIns="50800" rIns="50800" tIns="25400" bIns="25400">
+            <a:spAutoFit/>
+          </a:bodyPr>
+          <a:lstStyle/>
+          <a:p>
+            <a:pPr algn="ctr">
+              <a:spcAft>
+                <a:spcPts val="100"/>
+              </a:spcAft>
+            </a:pPr>
+            <a:r>
+              <a:rPr sz="1400" b="1">
+                <a:solidFill>
+                  <a:srgbClr val="FFFFFF"/>
+                </a:solidFill>
+                <a:latin typeface="Sarabun"/>
+                <a:ea typeface="Sarabun"/>
+                <a:cs typeface="Sarabun"/>
+              </a:rPr>
+              <a:t>Schedule</a:t>
+            </a:r>
+          </a:p>
+          <a:p>
+            <a:pPr algn="ctr">
+              <a:spcAft>
+                <a:spcPts val="100"/>
+              </a:spcAft>
+            </a:pPr>
+            <a:r>
+              <a:rPr sz="1200" b="0">
+                <a:solidFill>
+                  <a:srgbClr val="FFFFFF"/>
+                </a:solidFill>
+                <a:latin typeface="Sarabun"/>
+                <a:ea typeface="Sarabun"/>
+                <a:cs typeface="Sarabun"/>
+              </a:rPr>
+              <a:t>add() · find_conflicts()</a:t>
+            </a:r>
+          </a:p>
+          <a:p>
+            <a:pPr algn="ctr">
+              <a:spcAft>
+                <a:spcPts val="100"/>
+              </a:spcAft>
+            </a:pPr>
+            <a:r>
+              <a:rPr sz="1200" b="0">
+                <a:solidFill>
+                  <a:srgbClr val="FFFFFF"/>
+                </a:solidFill>
+                <a:latin typeface="Sarabun"/>
+                <a:ea typeface="Sarabun"/>
+                <a:cs typeface="Sarabun"/>
+              </a:rPr>
+              <a:t>day/week/month_view() · mark_done()</a:t>
+            </a:r>
+          </a:p>
+        </p:txBody>
+      </p:sp>
+      <p:cxnSp>
+        <p:nvCxnSpPr>
+          <p:cNvPr id="13" name="Connector 12"/>
+          <p:cNvCxnSpPr/>
+          <p:nvPr/>
+        </p:nvCxnSpPr>
+        <p:spPr>
+          <a:xfrm>
+            <a:off x="3937000" y="2032000"/>
+            <a:ext cx="381000" cy="0"/>
+          </a:xfrm>
+          <a:prstGeom prst="line">
+            <a:avLst/>
+          </a:prstGeom>
+          <a:ln w="19050">
+            <a:solidFill>
+              <a:srgbClr val="B39DDB"/>
+            </a:solidFill>
+          </a:ln>
+        </p:spPr>
+        <p:style>
+          <a:lnRef idx="2">
+            <a:schemeClr val="accent1"/>
+          </a:lnRef>
+          <a:fillRef idx="0">
+            <a:schemeClr val="accent1"/>
+          </a:fillRef>
+          <a:effectRef idx="1">
+            <a:schemeClr val="accent1"/>
+          </a:effectRef>
+          <a:fontRef idx="minor">
+            <a:schemeClr val="tx1"/>
+          </a:fontRef>
+        </p:style>
+      </p:cxnSp>
+      <p:sp>
+        <p:nvSpPr>
+          <p:cNvPr id="14" name="TextBox 13"/>
+          <p:cNvSpPr txBox="1"/>
+          <p:nvPr/>
+        </p:nvSpPr>
+        <p:spPr>
+          <a:xfrm>
+            <a:off x="3886200" y="2032000"/>
+            <a:ext cx="254000" cy="254000"/>
+          </a:xfrm>
+          <a:prstGeom prst="rect">
+            <a:avLst/>
+          </a:prstGeom>
+          <a:noFill/>
+        </p:spPr>
+        <p:txBody>
+          <a:bodyPr wrap="square" anchor="t" lIns="50800" rIns="50800" tIns="25400" bIns="25400">
+            <a:spAutoFit/>
+          </a:bodyPr>
+          <a:lstStyle/>
+          <a:p>
+            <a:pPr algn="l">
+              <a:spcAft>
+                <a:spcPts val="600"/>
+              </a:spcAft>
+            </a:pPr>
+            <a:r>
+              <a:rPr sz="1400" b="0">
+                <a:solidFill>
+                  <a:srgbClr val="B39DDB"/>
+                </a:solidFill>
+                <a:latin typeface="Sarabun"/>
+                <a:ea typeface="Sarabun"/>
+                <a:cs typeface="Sarabun"/>
+              </a:rPr>
+              <a:t>*</a:t>
+            </a:r>
+          </a:p>
+        </p:txBody>
+      </p:sp>
+      <p:sp>
+        <p:nvSpPr>
+          <p:cNvPr id="15" name="TextBox 14"/>
+          <p:cNvSpPr txBox="1"/>
+          <p:nvPr/>
+        </p:nvSpPr>
+        <p:spPr>
+          <a:xfrm>
+            <a:off x="4140200" y="2032000"/>
+            <a:ext cx="254000" cy="254000"/>
+          </a:xfrm>
+          <a:prstGeom prst="rect">
+            <a:avLst/>
+          </a:prstGeom>
+          <a:noFill/>
+        </p:spPr>
+        <p:txBody>
+          <a:bodyPr wrap="square" anchor="t" lIns="50800" rIns="50800" tIns="25400" bIns="25400">
+            <a:spAutoFit/>
+          </a:bodyPr>
+          <a:lstStyle/>
+          <a:p>
+            <a:pPr algn="l">
+              <a:spcAft>
+                <a:spcPts val="600"/>
+              </a:spcAft>
+            </a:pPr>
+            <a:r>
+              <a:rPr sz="1300" b="0">
+                <a:solidFill>
+                  <a:srgbClr val="B39DDB"/>
+                </a:solidFill>
+                <a:latin typeface="Sarabun"/>
+                <a:ea typeface="Sarabun"/>
+                <a:cs typeface="Sarabun"/>
+              </a:rPr>
+              <a:t>1</a:t>
+            </a:r>
+          </a:p>
+        </p:txBody>
+      </p:sp>
+      <p:sp>
+        <p:nvSpPr>
+          <p:cNvPr id="16" name="TextBox 15"/>
+          <p:cNvSpPr txBox="1"/>
+          <p:nvPr/>
+        </p:nvSpPr>
+        <p:spPr>
+          <a:xfrm>
+            <a:off x="508000" y="2590800"/>
+            <a:ext cx="3429000" cy="279400"/>
+          </a:xfrm>
+          <a:prstGeom prst="rect">
+            <a:avLst/>
+          </a:prstGeom>
+          <a:noFill/>
+        </p:spPr>
+        <p:txBody>
+          <a:bodyPr wrap="square" anchor="t" lIns="50800" rIns="50800" tIns="25400" bIns="25400">
+            <a:spAutoFit/>
+          </a:bodyPr>
+          <a:lstStyle/>
+          <a:p>
+            <a:pPr algn="ctr">
+              <a:spcAft>
+                <a:spcPts val="600"/>
+              </a:spcAft>
+            </a:pPr>
+            <a:r>
+              <a:rPr sz="1200" b="0">
+                <a:solidFill>
+                  <a:srgbClr val="B39DDB"/>
+                </a:solidFill>
+                <a:latin typeface="Sarabun"/>
+                <a:ea typeface="Sarabun"/>
+                <a:cs typeface="Sarabun"/>
+              </a:rPr>
+              <a:t>หลายรายการ ต่อ 1 Lawyer (สไลด์ 4)</a:t>
+            </a:r>
+          </a:p>
+        </p:txBody>
+      </p:sp>
+      <p:cxnSp>
+        <p:nvCxnSpPr>
+          <p:cNvPr id="17" name="Connector 16"/>
+          <p:cNvCxnSpPr/>
+          <p:nvPr/>
+        </p:nvCxnSpPr>
+        <p:spPr>
+          <a:xfrm>
+            <a:off x="9969500" y="2565400"/>
+            <a:ext cx="0" cy="609600"/>
+          </a:xfrm>
+          <a:prstGeom prst="line">
+            <a:avLst/>
+          </a:prstGeom>
+          <a:ln w="19050">
+            <a:solidFill>
+              <a:srgbClr val="B39DDB"/>
+            </a:solidFill>
+            <a:prstDash val="dash"/>
+          </a:ln>
+        </p:spPr>
+        <p:style>
+          <a:lnRef idx="2">
+            <a:schemeClr val="accent1"/>
+          </a:lnRef>
+          <a:fillRef idx="0">
+            <a:schemeClr val="accent1"/>
+          </a:fillRef>
+          <a:effectRef idx="1">
+            <a:schemeClr val="accent1"/>
+          </a:effectRef>
+          <a:fontRef idx="minor">
+            <a:schemeClr val="tx1"/>
+          </a:fontRef>
+        </p:style>
+      </p:cxnSp>
+      <p:sp>
+        <p:nvSpPr>
+          <p:cNvPr id="18" name="TextBox 17"/>
+          <p:cNvSpPr txBox="1"/>
+          <p:nvPr/>
+        </p:nvSpPr>
+        <p:spPr>
+          <a:xfrm>
+            <a:off x="10033000" y="2667000"/>
+            <a:ext cx="1651000" cy="279400"/>
+          </a:xfrm>
+          <a:prstGeom prst="rect">
+            <a:avLst/>
+          </a:prstGeom>
+          <a:noFill/>
+        </p:spPr>
+        <p:txBody>
+          <a:bodyPr wrap="square" anchor="t" lIns="50800" rIns="50800" tIns="25400" bIns="25400">
+            <a:spAutoFit/>
+          </a:bodyPr>
+          <a:lstStyle/>
+          <a:p>
+            <a:pPr algn="l">
+              <a:spcAft>
+                <a:spcPts val="600"/>
+              </a:spcAft>
+            </a:pPr>
+            <a:r>
+              <a:rPr sz="1200" b="0">
+                <a:solidFill>
+                  <a:srgbClr val="B39DDB"/>
+                </a:solidFill>
+                <a:latin typeface="Sarabun"/>
+                <a:ea typeface="Sarabun"/>
+                <a:cs typeface="Sarabun"/>
+              </a:rPr>
+              <a:t>◇ ยืมลิสต์นัด</a:t>
+            </a:r>
+          </a:p>
+        </p:txBody>
+      </p:sp>
+      <p:sp>
+        <p:nvSpPr>
+          <p:cNvPr id="19" name="Rectangle 18"/>
+          <p:cNvSpPr/>
+          <p:nvPr/>
+        </p:nvSpPr>
+        <p:spPr>
+          <a:xfrm>
+            <a:off x="508000" y="3048000"/>
+            <a:ext cx="3429000" cy="1270000"/>
+          </a:xfrm>
+          <a:prstGeom prst="rect">
+            <a:avLst/>
+          </a:prstGeom>
+          <a:solidFill>
+            <a:srgbClr val="2B2B2B"/>
+          </a:solidFill>
+          <a:ln w="15875">
+            <a:solidFill>
+              <a:srgbClr val="444444"/>
+            </a:solidFill>
+          </a:ln>
+          <a:effectLst/>
+        </p:spPr>
+        <p:style>
+          <a:lnRef idx="1">
+            <a:schemeClr val="accent1"/>
+          </a:lnRef>
+          <a:fillRef idx="3">
+            <a:schemeClr val="accent1"/>
+          </a:fillRef>
+          <a:effectRef idx="2">
+            <a:schemeClr val="accent1"/>
+          </a:effectRef>
+          <a:fontRef idx="minor">
+            <a:schemeClr val="lt1"/>
+          </a:fontRef>
+        </p:style>
+        <p:txBody>
+          <a:bodyPr rtlCol="0" anchor="ctr"/>
+          <a:lstStyle/>
+          <a:p>
+            <a:pPr algn="ctr"/>
+          </a:p>
+        </p:txBody>
+      </p:sp>
+      <p:sp>
+        <p:nvSpPr>
+          <p:cNvPr id="20" name="TextBox 19"/>
+          <p:cNvSpPr txBox="1"/>
+          <p:nvPr/>
+        </p:nvSpPr>
+        <p:spPr>
+          <a:xfrm>
+            <a:off x="558800" y="3098800"/>
+            <a:ext cx="3327400" cy="1168400"/>
+          </a:xfrm>
+          <a:prstGeom prst="rect">
+            <a:avLst/>
+          </a:prstGeom>
+          <a:noFill/>
+        </p:spPr>
+        <p:txBody>
+          <a:bodyPr wrap="square" anchor="ctr" lIns="50800" rIns="50800" tIns="25400" bIns="25400">
+            <a:spAutoFit/>
+          </a:bodyPr>
+          <a:lstStyle/>
+          <a:p>
+            <a:pPr algn="ctr">
+              <a:spcAft>
+                <a:spcPts val="100"/>
+              </a:spcAft>
+            </a:pPr>
+            <a:r>
+              <a:rPr sz="1400" b="1">
+                <a:solidFill>
+                  <a:srgbClr val="FFFFFF"/>
+                </a:solidFill>
+                <a:latin typeface="Sarabun"/>
+                <a:ea typeface="Sarabun"/>
+                <a:cs typeface="Sarabun"/>
+              </a:rPr>
+              <a:t>Appointment «abstract»</a:t>
+            </a:r>
+          </a:p>
+          <a:p>
+            <a:pPr algn="ctr">
+              <a:spcAft>
+                <a:spcPts val="100"/>
+              </a:spcAft>
+            </a:pPr>
+            <a:r>
+              <a:rPr sz="1200" b="0">
+                <a:solidFill>
+                  <a:srgbClr val="FFFFFF"/>
+                </a:solidFill>
+                <a:latin typeface="Sarabun"/>
+                <a:ea typeface="Sarabun"/>
+                <a:cs typeface="Sarabun"/>
+              </a:rPr>
+              <a:t>reminder_lead_days()* · kind_label()*</a:t>
+            </a:r>
+          </a:p>
+          <a:p>
+            <a:pPr algn="ctr">
+              <a:spcAft>
+                <a:spcPts val="100"/>
+              </a:spcAft>
+            </a:pPr>
+            <a:r>
+              <a:rPr sz="1200" b="0">
+                <a:solidFill>
+                  <a:srgbClr val="FFFFFF"/>
+                </a:solidFill>
+                <a:latin typeface="Sarabun"/>
+                <a:ea typeface="Sarabun"/>
+                <a:cs typeface="Sarabun"/>
+              </a:rPr>
+              <a:t>can_reschedule()* · overlaps()</a:t>
+            </a:r>
+          </a:p>
+          <a:p>
+            <a:pPr algn="ctr">
+              <a:spcAft>
+                <a:spcPts val="100"/>
+              </a:spcAft>
+            </a:pPr>
+            <a:r>
+              <a:rPr sz="1200" b="0">
+                <a:solidFill>
+                  <a:srgbClr val="FFFFFF"/>
+                </a:solidFill>
+                <a:latin typeface="Sarabun"/>
+                <a:ea typeface="Sarabun"/>
+                <a:cs typeface="Sarabun"/>
+              </a:rPr>
+              <a:t>reschedule() · cancel() · is_due_soon()</a:t>
+            </a:r>
+          </a:p>
+        </p:txBody>
+      </p:sp>
+      <p:sp>
+        <p:nvSpPr>
+          <p:cNvPr id="21" name="Rectangle 20"/>
+          <p:cNvSpPr/>
+          <p:nvPr/>
+        </p:nvSpPr>
+        <p:spPr>
+          <a:xfrm>
+            <a:off x="508000" y="4724400"/>
+            <a:ext cx="3429000" cy="1016000"/>
+          </a:xfrm>
+          <a:prstGeom prst="rect">
+            <a:avLst/>
+          </a:prstGeom>
+          <a:solidFill>
+            <a:srgbClr val="362D4A"/>
+          </a:solidFill>
+          <a:ln w="15875">
+            <a:solidFill>
+              <a:srgbClr val="B39DDB"/>
+            </a:solidFill>
+          </a:ln>
+          <a:effectLst/>
+        </p:spPr>
+        <p:style>
+          <a:lnRef idx="1">
+            <a:schemeClr val="accent1"/>
+          </a:lnRef>
+          <a:fillRef idx="3">
+            <a:schemeClr val="accent1"/>
+          </a:fillRef>
+          <a:effectRef idx="2">
+            <a:schemeClr val="accent1"/>
+          </a:effectRef>
+          <a:fontRef idx="minor">
+            <a:schemeClr val="lt1"/>
+          </a:fontRef>
+        </p:style>
+        <p:txBody>
+          <a:bodyPr rtlCol="0" anchor="ctr"/>
+          <a:lstStyle/>
+          <a:p>
+            <a:pPr algn="ctr"/>
+          </a:p>
+        </p:txBody>
+      </p:sp>
+      <p:sp>
+        <p:nvSpPr>
+          <p:cNvPr id="22" name="TextBox 21"/>
+          <p:cNvSpPr txBox="1"/>
+          <p:nvPr/>
+        </p:nvSpPr>
+        <p:spPr>
+          <a:xfrm>
+            <a:off x="558800" y="4775200"/>
+            <a:ext cx="3327400" cy="914400"/>
+          </a:xfrm>
+          <a:prstGeom prst="rect">
+            <a:avLst/>
+          </a:prstGeom>
+          <a:noFill/>
+        </p:spPr>
+        <p:txBody>
+          <a:bodyPr wrap="square" anchor="ctr" lIns="50800" rIns="50800" tIns="25400" bIns="25400">
+            <a:spAutoFit/>
+          </a:bodyPr>
+          <a:lstStyle/>
+          <a:p>
+            <a:pPr algn="ctr">
+              <a:spcAft>
+                <a:spcPts val="100"/>
+              </a:spcAft>
+            </a:pPr>
+            <a:r>
+              <a:rPr sz="1400" b="1">
+                <a:solidFill>
+                  <a:srgbClr val="FFFFFF"/>
+                </a:solidFill>
+                <a:latin typeface="Sarabun"/>
+                <a:ea typeface="Sarabun"/>
+                <a:cs typeface="Sarabun"/>
+              </a:rPr>
+              <a:t>CourtHearing · ClientMeeting</a:t>
+            </a:r>
+          </a:p>
+          <a:p>
+            <a:pPr algn="ctr">
+              <a:spcAft>
+                <a:spcPts val="100"/>
+              </a:spcAft>
+            </a:pPr>
+            <a:r>
+              <a:rPr sz="1200" b="0">
+                <a:solidFill>
+                  <a:srgbClr val="FFFFFF"/>
+                </a:solidFill>
+                <a:latin typeface="Sarabun"/>
+                <a:ea typeface="Sarabun"/>
+                <a:cs typeface="Sarabun"/>
+              </a:rPr>
+              <a:t>FilingDeadline</a:t>
+            </a:r>
+          </a:p>
+          <a:p>
+            <a:pPr algn="ctr">
+              <a:spcAft>
+                <a:spcPts val="100"/>
+              </a:spcAft>
+            </a:pPr>
+            <a:r>
+              <a:rPr sz="1200" b="0">
+                <a:solidFill>
+                  <a:srgbClr val="A6A6A6"/>
+                </a:solidFill>
+                <a:latin typeface="Sarabun"/>
+                <a:ea typeface="Sarabun"/>
+                <a:cs typeface="Sarabun"/>
+              </a:rPr>
+              <a:t>นัดศาล 3 วัน · พบลูกความ 1 วัน · ยื่น 15 วัน</a:t>
+            </a:r>
+          </a:p>
+        </p:txBody>
+      </p:sp>
+      <p:cxnSp>
+        <p:nvCxnSpPr>
+          <p:cNvPr id="23" name="Connector 22"/>
+          <p:cNvCxnSpPr/>
+          <p:nvPr/>
+        </p:nvCxnSpPr>
+        <p:spPr>
+          <a:xfrm flipV="1">
+            <a:off x="2222500" y="4318000"/>
+            <a:ext cx="0" cy="406400"/>
+          </a:xfrm>
+          <a:prstGeom prst="line">
+            <a:avLst/>
+          </a:prstGeom>
+          <a:ln w="19050">
+            <a:solidFill>
+              <a:srgbClr val="B39DDB"/>
+            </a:solidFill>
+            <a:tailEnd type="triangle" w="med" len="med"/>
+          </a:ln>
+        </p:spPr>
+        <p:style>
+          <a:lnRef idx="2">
+            <a:schemeClr val="accent1"/>
+          </a:lnRef>
+          <a:fillRef idx="0">
+            <a:schemeClr val="accent1"/>
+          </a:fillRef>
+          <a:effectRef idx="1">
+            <a:schemeClr val="accent1"/>
+          </a:effectRef>
+          <a:fontRef idx="minor">
+            <a:schemeClr val="tx1"/>
+          </a:fontRef>
+        </p:style>
+      </p:cxnSp>
+      <p:cxnSp>
+        <p:nvCxnSpPr>
+          <p:cNvPr id="24" name="Connector 23"/>
+          <p:cNvCxnSpPr/>
+          <p:nvPr/>
+        </p:nvCxnSpPr>
+        <p:spPr>
+          <a:xfrm>
+            <a:off x="6096000" y="2565400"/>
+            <a:ext cx="0" cy="482600"/>
+          </a:xfrm>
+          <a:prstGeom prst="line">
+            <a:avLst/>
+          </a:prstGeom>
+          <a:ln w="19050">
+            <a:solidFill>
+              <a:srgbClr val="B39DDB"/>
+            </a:solidFill>
+          </a:ln>
+        </p:spPr>
+        <p:style>
+          <a:lnRef idx="2">
+            <a:schemeClr val="accent1"/>
+          </a:lnRef>
+          <a:fillRef idx="0">
+            <a:schemeClr val="accent1"/>
+          </a:fillRef>
+          <a:effectRef idx="1">
+            <a:schemeClr val="accent1"/>
+          </a:effectRef>
+          <a:fontRef idx="minor">
+            <a:schemeClr val="tx1"/>
+          </a:fontRef>
+        </p:style>
+      </p:cxnSp>
+      <p:sp>
+        <p:nvSpPr>
+          <p:cNvPr id="25" name="TextBox 24"/>
+          <p:cNvSpPr txBox="1"/>
+          <p:nvPr/>
+        </p:nvSpPr>
+        <p:spPr>
+          <a:xfrm>
+            <a:off x="6146800" y="2590800"/>
+            <a:ext cx="381000" cy="254000"/>
+          </a:xfrm>
+          <a:prstGeom prst="rect">
+            <a:avLst/>
+          </a:prstGeom>
+          <a:noFill/>
+        </p:spPr>
+        <p:txBody>
+          <a:bodyPr wrap="square" anchor="t" lIns="50800" rIns="50800" tIns="25400" bIns="25400">
+            <a:spAutoFit/>
+          </a:bodyPr>
+          <a:lstStyle/>
+          <a:p>
+            <a:pPr algn="l">
+              <a:spcAft>
+                <a:spcPts val="600"/>
+              </a:spcAft>
+            </a:pPr>
+            <a:r>
+              <a:rPr sz="1300" b="0">
+                <a:solidFill>
+                  <a:srgbClr val="B39DDB"/>
+                </a:solidFill>
+                <a:latin typeface="Sarabun"/>
+                <a:ea typeface="Sarabun"/>
+                <a:cs typeface="Sarabun"/>
+              </a:rPr>
+              <a:t>1</a:t>
+            </a:r>
+          </a:p>
+        </p:txBody>
+      </p:sp>
+      <p:sp>
+        <p:nvSpPr>
+          <p:cNvPr id="26" name="TextBox 25"/>
+          <p:cNvSpPr txBox="1"/>
+          <p:nvPr/>
+        </p:nvSpPr>
+        <p:spPr>
+          <a:xfrm>
+            <a:off x="6146800" y="2819400"/>
+            <a:ext cx="381000" cy="254000"/>
+          </a:xfrm>
+          <a:prstGeom prst="rect">
+            <a:avLst/>
+          </a:prstGeom>
+          <a:noFill/>
+        </p:spPr>
+        <p:txBody>
+          <a:bodyPr wrap="square" anchor="t" lIns="50800" rIns="50800" tIns="25400" bIns="25400">
+            <a:spAutoFit/>
+          </a:bodyPr>
+          <a:lstStyle/>
+          <a:p>
+            <a:pPr algn="l">
+              <a:spcAft>
+                <a:spcPts val="600"/>
+              </a:spcAft>
+            </a:pPr>
+            <a:r>
+              <a:rPr sz="1400" b="0">
+                <a:solidFill>
+                  <a:srgbClr val="B39DDB"/>
+                </a:solidFill>
+                <a:latin typeface="Sarabun"/>
+                <a:ea typeface="Sarabun"/>
+                <a:cs typeface="Sarabun"/>
+              </a:rPr>
+              <a:t>*</a:t>
+            </a:r>
+          </a:p>
+        </p:txBody>
+      </p:sp>
+      <p:sp>
+        <p:nvSpPr>
+          <p:cNvPr id="27" name="Rectangle 26"/>
+          <p:cNvSpPr/>
+          <p:nvPr/>
+        </p:nvSpPr>
+        <p:spPr>
+          <a:xfrm>
+            <a:off x="4318000" y="3048000"/>
+            <a:ext cx="3556000" cy="889000"/>
+          </a:xfrm>
+          <a:prstGeom prst="rect">
+            <a:avLst/>
+          </a:prstGeom>
+          <a:solidFill>
+            <a:srgbClr val="2B2B2B"/>
+          </a:solidFill>
+          <a:ln w="15875">
+            <a:solidFill>
+              <a:srgbClr val="444444"/>
+            </a:solidFill>
+          </a:ln>
+          <a:effectLst/>
+        </p:spPr>
+        <p:style>
+          <a:lnRef idx="1">
+            <a:schemeClr val="accent1"/>
+          </a:lnRef>
+          <a:fillRef idx="3">
+            <a:schemeClr val="accent1"/>
+          </a:fillRef>
+          <a:effectRef idx="2">
+            <a:schemeClr val="accent1"/>
+          </a:effectRef>
+          <a:fontRef idx="minor">
+            <a:schemeClr val="lt1"/>
+          </a:fontRef>
+        </p:style>
+        <p:txBody>
+          <a:bodyPr rtlCol="0" anchor="ctr"/>
+          <a:lstStyle/>
+          <a:p>
+            <a:pPr algn="ctr"/>
+          </a:p>
+        </p:txBody>
+      </p:sp>
+      <p:sp>
+        <p:nvSpPr>
+          <p:cNvPr id="28" name="TextBox 27"/>
+          <p:cNvSpPr txBox="1"/>
+          <p:nvPr/>
+        </p:nvSpPr>
+        <p:spPr>
+          <a:xfrm>
+            <a:off x="4368800" y="3098800"/>
+            <a:ext cx="3454400" cy="787400"/>
+          </a:xfrm>
+          <a:prstGeom prst="rect">
+            <a:avLst/>
+          </a:prstGeom>
+          <a:noFill/>
+        </p:spPr>
+        <p:txBody>
+          <a:bodyPr wrap="square" anchor="ctr" lIns="50800" rIns="50800" tIns="25400" bIns="25400">
+            <a:spAutoFit/>
+          </a:bodyPr>
+          <a:lstStyle/>
+          <a:p>
+            <a:pPr algn="ctr">
+              <a:spcAft>
+                <a:spcPts val="100"/>
+              </a:spcAft>
+            </a:pPr>
+            <a:r>
+              <a:rPr sz="1400" b="1">
+                <a:solidFill>
+                  <a:srgbClr val="FFFFFF"/>
+                </a:solidFill>
+                <a:latin typeface="Sarabun"/>
+                <a:ea typeface="Sarabun"/>
+                <a:cs typeface="Sarabun"/>
+              </a:rPr>
+              <a:t>CaseNote · CaseEvent</a:t>
+            </a:r>
+          </a:p>
+          <a:p>
+            <a:pPr algn="ctr">
+              <a:spcAft>
+                <a:spcPts val="100"/>
+              </a:spcAft>
+            </a:pPr>
+            <a:r>
+              <a:rPr sz="1200" b="0">
+                <a:solidFill>
+                  <a:srgbClr val="FFFFFF"/>
+                </a:solidFill>
+                <a:latin typeface="Sarabun"/>
+                <a:ea typeface="Sarabun"/>
+                <a:cs typeface="Sarabun"/>
+              </a:rPr>
+              <a:t>คดี 1 : * (ผูกด้วย case_id)</a:t>
+            </a:r>
+          </a:p>
+          <a:p>
+            <a:pPr algn="ctr">
+              <a:spcAft>
+                <a:spcPts val="100"/>
+              </a:spcAft>
+            </a:pPr>
+            <a:r>
+              <a:rPr sz="1200" b="0">
+                <a:solidFill>
+                  <a:srgbClr val="A6A6A6"/>
+                </a:solidFill>
+                <a:latin typeface="Sarabun"/>
+                <a:ea typeface="Sarabun"/>
+                <a:cs typeface="Sarabun"/>
+              </a:rPr>
+              <a:t>validate_text() · can_modify()</a:t>
+            </a:r>
+          </a:p>
+        </p:txBody>
+      </p:sp>
+      <p:sp>
+        <p:nvSpPr>
+          <p:cNvPr id="29" name="Rectangle 28"/>
+          <p:cNvSpPr/>
+          <p:nvPr/>
+        </p:nvSpPr>
+        <p:spPr>
+          <a:xfrm>
+            <a:off x="4318000" y="4127500"/>
+            <a:ext cx="3556000" cy="698500"/>
+          </a:xfrm>
+          <a:prstGeom prst="rect">
+            <a:avLst/>
+          </a:prstGeom>
+          <a:solidFill>
+            <a:srgbClr val="2B2B2B"/>
+          </a:solidFill>
+          <a:ln w="15875">
+            <a:solidFill>
+              <a:srgbClr val="444444"/>
+            </a:solidFill>
+          </a:ln>
+          <a:effectLst/>
+        </p:spPr>
+        <p:style>
+          <a:lnRef idx="1">
+            <a:schemeClr val="accent1"/>
+          </a:lnRef>
+          <a:fillRef idx="3">
+            <a:schemeClr val="accent1"/>
+          </a:fillRef>
+          <a:effectRef idx="2">
+            <a:schemeClr val="accent1"/>
+          </a:effectRef>
+          <a:fontRef idx="minor">
+            <a:schemeClr val="lt1"/>
+          </a:fontRef>
+        </p:style>
+        <p:txBody>
+          <a:bodyPr rtlCol="0" anchor="ctr"/>
+          <a:lstStyle/>
+          <a:p>
+            <a:pPr algn="ctr"/>
+          </a:p>
+        </p:txBody>
+      </p:sp>
+      <p:sp>
+        <p:nvSpPr>
+          <p:cNvPr id="30" name="TextBox 29"/>
+          <p:cNvSpPr txBox="1"/>
+          <p:nvPr/>
+        </p:nvSpPr>
+        <p:spPr>
+          <a:xfrm>
+            <a:off x="4368800" y="4178300"/>
+            <a:ext cx="3454400" cy="596900"/>
+          </a:xfrm>
+          <a:prstGeom prst="rect">
+            <a:avLst/>
+          </a:prstGeom>
+          <a:noFill/>
+        </p:spPr>
+        <p:txBody>
+          <a:bodyPr wrap="square" anchor="ctr" lIns="50800" rIns="50800" tIns="25400" bIns="25400">
+            <a:spAutoFit/>
+          </a:bodyPr>
+          <a:lstStyle/>
+          <a:p>
+            <a:pPr algn="ctr">
+              <a:spcAft>
+                <a:spcPts val="100"/>
+              </a:spcAft>
+            </a:pPr>
+            <a:r>
+              <a:rPr sz="1400" b="1">
+                <a:solidFill>
+                  <a:srgbClr val="FFFFFF"/>
+                </a:solidFill>
+                <a:latin typeface="Sarabun"/>
+                <a:ea typeface="Sarabun"/>
+                <a:cs typeface="Sarabun"/>
+              </a:rPr>
+              <a:t>Client</a:t>
+            </a:r>
+          </a:p>
+          <a:p>
+            <a:pPr algn="ctr">
+              <a:spcAft>
+                <a:spcPts val="100"/>
+              </a:spcAft>
+            </a:pPr>
+            <a:r>
+              <a:rPr sz="1200" b="0">
+                <a:solidFill>
+                  <a:srgbClr val="A6A6A6"/>
+                </a:solidFill>
+                <a:latin typeface="Sarabun"/>
+                <a:ea typeface="Sarabun"/>
+                <a:cs typeface="Sarabun"/>
+              </a:rPr>
+              <a:t>ลูกความ 1 : คดี * (case.client)</a:t>
+            </a:r>
+          </a:p>
+        </p:txBody>
+      </p:sp>
+      <p:sp>
+        <p:nvSpPr>
+          <p:cNvPr id="31" name="Rectangle 30"/>
+          <p:cNvSpPr/>
+          <p:nvPr/>
+        </p:nvSpPr>
+        <p:spPr>
+          <a:xfrm>
+            <a:off x="8255000" y="3175000"/>
+            <a:ext cx="3429000" cy="1270000"/>
+          </a:xfrm>
+          <a:prstGeom prst="rect">
+            <a:avLst/>
+          </a:prstGeom>
+          <a:solidFill>
+            <a:srgbClr val="2B2B2B"/>
+          </a:solidFill>
+          <a:ln w="15875">
+            <a:solidFill>
+              <a:srgbClr val="444444"/>
+            </a:solidFill>
+          </a:ln>
+          <a:effectLst/>
+        </p:spPr>
+        <p:style>
+          <a:lnRef idx="1">
+            <a:schemeClr val="accent1"/>
+          </a:lnRef>
+          <a:fillRef idx="3">
+            <a:schemeClr val="accent1"/>
+          </a:fillRef>
+          <a:effectRef idx="2">
+            <a:schemeClr val="accent1"/>
+          </a:effectRef>
+          <a:fontRef idx="minor">
+            <a:schemeClr val="lt1"/>
+          </a:fontRef>
+        </p:style>
+        <p:txBody>
+          <a:bodyPr rtlCol="0" anchor="ctr"/>
+          <a:lstStyle/>
+          <a:p>
+            <a:pPr algn="ctr"/>
+          </a:p>
+        </p:txBody>
+      </p:sp>
+      <p:sp>
+        <p:nvSpPr>
+          <p:cNvPr id="32" name="TextBox 31"/>
+          <p:cNvSpPr txBox="1"/>
+          <p:nvPr/>
+        </p:nvSpPr>
+        <p:spPr>
+          <a:xfrm>
+            <a:off x="8305800" y="3225800"/>
+            <a:ext cx="3327400" cy="1168400"/>
+          </a:xfrm>
+          <a:prstGeom prst="rect">
+            <a:avLst/>
+          </a:prstGeom>
+          <a:noFill/>
+        </p:spPr>
+        <p:txBody>
+          <a:bodyPr wrap="square" anchor="ctr" lIns="50800" rIns="50800" tIns="25400" bIns="25400">
+            <a:spAutoFit/>
+          </a:bodyPr>
+          <a:lstStyle/>
+          <a:p>
+            <a:pPr algn="ctr">
+              <a:spcAft>
+                <a:spcPts val="100"/>
+              </a:spcAft>
+            </a:pPr>
+            <a:r>
+              <a:rPr sz="1400" b="1">
+                <a:solidFill>
+                  <a:srgbClr val="FFFFFF"/>
+                </a:solidFill>
+                <a:latin typeface="Sarabun"/>
+                <a:ea typeface="Sarabun"/>
+                <a:cs typeface="Sarabun"/>
+              </a:rPr>
+              <a:t>«enum» · @dataclass</a:t>
+            </a:r>
+          </a:p>
+          <a:p>
+            <a:pPr algn="ctr">
+              <a:spcAft>
+                <a:spcPts val="100"/>
+              </a:spcAft>
+            </a:pPr>
+            <a:r>
+              <a:rPr sz="1200" b="0">
+                <a:solidFill>
+                  <a:srgbClr val="FFFFFF"/>
+                </a:solidFill>
+                <a:latin typeface="Sarabun"/>
+                <a:ea typeface="Sarabun"/>
+                <a:cs typeface="Sarabun"/>
+              </a:rPr>
+              <a:t>CaseStatus 7 ค่า</a:t>
+            </a:r>
+          </a:p>
+          <a:p>
+            <a:pPr algn="ctr">
+              <a:spcAft>
+                <a:spcPts val="100"/>
+              </a:spcAft>
+            </a:pPr>
+            <a:r>
+              <a:rPr sz="1200" b="0">
+                <a:solidFill>
+                  <a:srgbClr val="FFFFFF"/>
+                </a:solidFill>
+                <a:latin typeface="Sarabun"/>
+                <a:ea typeface="Sarabun"/>
+                <a:cs typeface="Sarabun"/>
+              </a:rPr>
+              <a:t>AssignmentStatus 4 ค่า</a:t>
+            </a:r>
+          </a:p>
+          <a:p>
+            <a:pPr algn="ctr">
+              <a:spcAft>
+                <a:spcPts val="100"/>
+              </a:spcAft>
+            </a:pPr>
+            <a:r>
+              <a:rPr sz="1200" b="0">
+                <a:solidFill>
+                  <a:srgbClr val="A6A6A6"/>
+                </a:solidFill>
+                <a:latin typeface="Sarabun"/>
+                <a:ea typeface="Sarabun"/>
+                <a:cs typeface="Sarabun"/>
+              </a:rPr>
+              <a:t>domain ทุกคลาสเป็น @dataclass</a:t>
+            </a:r>
+          </a:p>
+        </p:txBody>
+      </p:sp>
+      <p:sp>
+        <p:nvSpPr>
+          <p:cNvPr id="33" name="TextBox 32"/>
+          <p:cNvSpPr txBox="1"/>
+          <p:nvPr/>
+        </p:nvSpPr>
+        <p:spPr>
+          <a:xfrm>
+            <a:off x="4318000" y="5016500"/>
+            <a:ext cx="7366000" cy="635000"/>
+          </a:xfrm>
+          <a:prstGeom prst="rect">
+            <a:avLst/>
+          </a:prstGeom>
+          <a:noFill/>
+        </p:spPr>
+        <p:txBody>
+          <a:bodyPr wrap="square" anchor="t" lIns="50800" rIns="50800" tIns="25400" bIns="25400">
+            <a:spAutoFit/>
+          </a:bodyPr>
+          <a:lstStyle/>
+          <a:p>
+            <a:pPr algn="l">
+              <a:spcAft>
+                <a:spcPts val="600"/>
+              </a:spcAft>
+            </a:pPr>
+            <a:r>
+              <a:rPr sz="1300" b="0">
+                <a:solidFill>
+                  <a:srgbClr val="B39DDB"/>
+                </a:solidFill>
+                <a:latin typeface="Sarabun"/>
+                <a:ea typeface="Sarabun"/>
+                <a:cs typeface="Sarabun"/>
+              </a:rPr>
+              <a:t>Case 1 : * มอบหมาย / นัด / โน้ต</a:t>
+            </a:r>
+          </a:p>
+          <a:p>
+            <a:pPr algn="l">
+              <a:spcAft>
+                <a:spcPts val="600"/>
+              </a:spcAft>
+            </a:pPr>
+            <a:r>
+              <a:rPr sz="1300" b="0">
+                <a:solidFill>
+                  <a:srgbClr val="B39DDB"/>
+                </a:solidFill>
+                <a:latin typeface="Sarabun"/>
+                <a:ea typeface="Sarabun"/>
+                <a:cs typeface="Sarabun"/>
+              </a:rPr>
+              <a:t>Schedule ◇ นัด * (ยืมลิสต์นัดจาก repo มาตรวจ)</a:t>
+            </a:r>
+          </a:p>
+        </p:txBody>
+      </p:sp>
+      <p:sp>
+        <p:nvSpPr>
+          <p:cNvPr id="34" name="TextBox 33"/>
+          <p:cNvSpPr txBox="1"/>
+          <p:nvPr/>
+        </p:nvSpPr>
+        <p:spPr>
+          <a:xfrm>
+            <a:off x="508000" y="6070600"/>
+            <a:ext cx="11176000" cy="279400"/>
+          </a:xfrm>
+          <a:prstGeom prst="rect">
+            <a:avLst/>
+          </a:prstGeom>
+          <a:noFill/>
+        </p:spPr>
+        <p:txBody>
+          <a:bodyPr wrap="square" anchor="t" lIns="50800" rIns="50800" tIns="25400" bIns="25400">
+            <a:spAutoFit/>
+          </a:bodyPr>
+          <a:lstStyle/>
+          <a:p>
+            <a:pPr algn="l">
+              <a:spcAft>
+                <a:spcPts val="600"/>
+              </a:spcAft>
+            </a:pPr>
+            <a:r>
+              <a:rPr sz="1200" b="0">
+                <a:solidFill>
+                  <a:srgbClr val="A6A6A6"/>
+                </a:solidFill>
+                <a:latin typeface="Sarabun"/>
+                <a:ea typeface="Sarabun"/>
+                <a:cs typeface="Sarabun"/>
+              </a:rPr>
+              <a:t>อ้างอิง: domain/case.py · assignment.py · appointment.py · schedule.py</a:t>
             </a:r>
           </a:p>
         </p:txBody>

--- a/docs/slides/LawFirm_Presentation_Backup.pptx
+++ b/docs/slides/LawFirm_Presentation_Backup.pptx
@@ -719,7 +719,7 @@
           <a:lstStyle/>
           <a:p>
             <a:r>
-              <a:t>ต่อไปเป็น demo มีสามฉาก ทุกบัญชีใช้รหัสผ่าน password123 ฉากแรก lawyer1 เปิด popup คดีรอตอบรับ กดรับคดี แล้วเพิ่มนัดศาลพรุ่งนี้ จากนั้นดูแผงรายการใกล้ครบกำหนด ฉากสอง manager1 ดูคิวคดีที่ยังไม่มีทนายตอบรับ กดมอบหมาย แล้วเปิดคำขอถอนตัว กดอนุมัติพร้อมย้ายนัด ฉากสาม admin เพิ่มผู้ใช้ใหม่เป็นทนาย ปิดใช้งาน แล้วเปิดคืน ถ้าเวลาน้อย จะเล่นแค่ฉากทนาย คือรับคดีกับเพิ่มนัด ก็เห็น loop หลักของระบบครบครับ</a:t>
+              <a:t>ถ้าอาจารย์ขอดู demo มีสามฉาก ทุกบัญชีใช้รหัสผ่าน password123 ฉากแรก lawyer1 เปิด popup คดีรอตอบรับ กดรับคดี แล้วเพิ่มนัดศาลพรุ่งนี้ จากนั้นดูแผงรายการใกล้ครบกำหนด ฉากสอง manager1 ดูคิวคดีที่ยังไม่มีทนายตอบรับ กดมอบหมาย แล้วเปิดคำขอถอนตัว กดอนุมัติพร้อมย้ายนัด ฉากสาม admin เพิ่มผู้ใช้ใหม่เป็นทนาย ปิดใช้งาน แล้วเปิดคืน ถ้าเวลาน้อย จะเล่นแค่ฉากทนาย คือรับคดีกับเพิ่มนัด ก็เห็น loop หลักของระบบครบครับ</a:t>
             </a:r>
           </a:p>
         </p:txBody>
@@ -3995,755 +3995,6 @@
 </p:sldMaster>
 </file>
 
-<file path=ppt/slides/slide13.xml><?xml version="1.0" encoding="utf-8"?>
-<p:sld xmlns:a="http://schemas.openxmlformats.org/drawingml/2006/main" xmlns:p="http://schemas.openxmlformats.org/presentationml/2006/main" xmlns:r="http://schemas.openxmlformats.org/officeDocument/2006/relationships">
-  <p:cSld>
-    <p:bg>
-      <p:bgPr>
-        <a:solidFill>
-          <a:srgbClr val="1E1E1E"/>
-        </a:solidFill>
-        <a:effectLst/>
-      </p:bgPr>
-    </p:bg>
-    <p:spTree>
-      <p:nvGrpSpPr>
-        <p:cNvPr id="1" name=""/>
-        <p:cNvGrpSpPr/>
-        <p:nvPr/>
-      </p:nvGrpSpPr>
-      <p:grpSpPr/>
-      <p:sp>
-        <p:nvSpPr>
-          <p:cNvPr id="2" name="TextBox 1"/>
-          <p:cNvSpPr txBox="1"/>
-          <p:nvPr/>
-        </p:nvSpPr>
-        <p:spPr>
-          <a:xfrm>
-            <a:off x="508000" y="330200"/>
-            <a:ext cx="10414000" cy="558800"/>
-          </a:xfrm>
-          <a:prstGeom prst="rect">
-            <a:avLst/>
-          </a:prstGeom>
-          <a:noFill/>
-        </p:spPr>
-        <p:txBody>
-          <a:bodyPr wrap="square" anchor="t" lIns="50800" rIns="50800" tIns="25400" bIns="25400">
-            <a:spAutoFit/>
-          </a:bodyPr>
-          <a:lstStyle/>
-          <a:p>
-            <a:pPr algn="l">
-              <a:spcAft>
-                <a:spcPts val="600"/>
-              </a:spcAft>
-            </a:pPr>
-            <a:r>
-              <a:rPr sz="2800" b="1">
-                <a:solidFill>
-                  <a:srgbClr val="FFFFFF"/>
-                </a:solidFill>
-                <a:latin typeface="Sarabun"/>
-                <a:ea typeface="Sarabun"/>
-                <a:cs typeface="Sarabun"/>
-              </a:rPr>
-              <a:t>คำถามที่อาจถูกถาม</a:t>
-            </a:r>
-          </a:p>
-        </p:txBody>
-      </p:sp>
-      <p:sp>
-        <p:nvSpPr>
-          <p:cNvPr id="3" name="TextBox 2"/>
-          <p:cNvSpPr txBox="1"/>
-          <p:nvPr/>
-        </p:nvSpPr>
-        <p:spPr>
-          <a:xfrm>
-            <a:off x="508000" y="863600"/>
-            <a:ext cx="10922000" cy="330200"/>
-          </a:xfrm>
-          <a:prstGeom prst="rect">
-            <a:avLst/>
-          </a:prstGeom>
-          <a:noFill/>
-        </p:spPr>
-        <p:txBody>
-          <a:bodyPr wrap="square" anchor="t" lIns="50800" rIns="50800" tIns="25400" bIns="25400">
-            <a:spAutoFit/>
-          </a:bodyPr>
-          <a:lstStyle/>
-          <a:p>
-            <a:pPr algn="l">
-              <a:spcAft>
-                <a:spcPts val="600"/>
-              </a:spcAft>
-            </a:pPr>
-            <a:r>
-              <a:rPr sz="1500" b="0">
-                <a:solidFill>
-                  <a:srgbClr val="A6A6A6"/>
-                </a:solidFill>
-                <a:latin typeface="Sarabun"/>
-                <a:ea typeface="Sarabun"/>
-                <a:cs typeface="Sarabun"/>
-              </a:rPr>
-              <a:t>สไลด์สำรอง เปิดเมื่อถูกถาม</a:t>
-            </a:r>
-          </a:p>
-        </p:txBody>
-      </p:sp>
-      <p:sp>
-        <p:nvSpPr>
-          <p:cNvPr id="4" name="Rectangle 3"/>
-          <p:cNvSpPr/>
-          <p:nvPr/>
-        </p:nvSpPr>
-        <p:spPr>
-          <a:xfrm>
-            <a:off x="508000" y="1295400"/>
-            <a:ext cx="11176000" cy="19050"/>
-          </a:xfrm>
-          <a:prstGeom prst="rect">
-            <a:avLst/>
-          </a:prstGeom>
-          <a:solidFill>
-            <a:srgbClr val="444444"/>
-          </a:solidFill>
-          <a:ln>
-            <a:noFill/>
-          </a:ln>
-          <a:effectLst/>
-        </p:spPr>
-        <p:style>
-          <a:lnRef idx="1">
-            <a:schemeClr val="accent1"/>
-          </a:lnRef>
-          <a:fillRef idx="3">
-            <a:schemeClr val="accent1"/>
-          </a:fillRef>
-          <a:effectRef idx="2">
-            <a:schemeClr val="accent1"/>
-          </a:effectRef>
-          <a:fontRef idx="minor">
-            <a:schemeClr val="lt1"/>
-          </a:fontRef>
-        </p:style>
-        <p:txBody>
-          <a:bodyPr rtlCol="0" anchor="ctr"/>
-          <a:lstStyle/>
-          <a:p>
-            <a:pPr algn="ctr"/>
-          </a:p>
-        </p:txBody>
-      </p:sp>
-      <p:sp>
-        <p:nvSpPr>
-          <p:cNvPr id="5" name="Rectangle 4"/>
-          <p:cNvSpPr/>
-          <p:nvPr/>
-        </p:nvSpPr>
-        <p:spPr>
-          <a:xfrm>
-            <a:off x="508000" y="1282700"/>
-            <a:ext cx="1016000" cy="38100"/>
-          </a:xfrm>
-          <a:prstGeom prst="rect">
-            <a:avLst/>
-          </a:prstGeom>
-          <a:solidFill>
-            <a:srgbClr val="B39DDB"/>
-          </a:solidFill>
-          <a:ln>
-            <a:noFill/>
-          </a:ln>
-          <a:effectLst/>
-        </p:spPr>
-        <p:style>
-          <a:lnRef idx="1">
-            <a:schemeClr val="accent1"/>
-          </a:lnRef>
-          <a:fillRef idx="3">
-            <a:schemeClr val="accent1"/>
-          </a:fillRef>
-          <a:effectRef idx="2">
-            <a:schemeClr val="accent1"/>
-          </a:effectRef>
-          <a:fontRef idx="minor">
-            <a:schemeClr val="lt1"/>
-          </a:fontRef>
-        </p:style>
-        <p:txBody>
-          <a:bodyPr rtlCol="0" anchor="ctr"/>
-          <a:lstStyle/>
-          <a:p>
-            <a:pPr algn="ctr"/>
-          </a:p>
-        </p:txBody>
-      </p:sp>
-      <p:sp>
-        <p:nvSpPr>
-          <p:cNvPr id="6" name="TextBox 5"/>
-          <p:cNvSpPr txBox="1"/>
-          <p:nvPr/>
-        </p:nvSpPr>
-        <p:spPr>
-          <a:xfrm>
-            <a:off x="10922000" y="355600"/>
-            <a:ext cx="762000" cy="381000"/>
-          </a:xfrm>
-          <a:prstGeom prst="rect">
-            <a:avLst/>
-          </a:prstGeom>
-          <a:noFill/>
-        </p:spPr>
-        <p:txBody>
-          <a:bodyPr wrap="square" anchor="t" lIns="50800" rIns="50800" tIns="25400" bIns="25400">
-            <a:spAutoFit/>
-          </a:bodyPr>
-          <a:lstStyle/>
-          <a:p>
-            <a:pPr algn="r">
-              <a:spcAft>
-                <a:spcPts val="600"/>
-              </a:spcAft>
-            </a:pPr>
-            <a:r>
-              <a:rPr sz="1400" b="0">
-                <a:solidFill>
-                  <a:srgbClr val="A6A6A6"/>
-                </a:solidFill>
-                <a:latin typeface="Sarabun"/>
-                <a:ea typeface="Sarabun"/>
-                <a:cs typeface="Sarabun"/>
-              </a:rPr>
-              <a:t/>
-            </a:r>
-          </a:p>
-        </p:txBody>
-      </p:sp>
-      <p:sp>
-        <p:nvSpPr>
-          <p:cNvPr id="7" name="Rectangle 6"/>
-          <p:cNvSpPr/>
-          <p:nvPr/>
-        </p:nvSpPr>
-        <p:spPr>
-          <a:xfrm>
-            <a:off x="508000" y="1524000"/>
-            <a:ext cx="5461000" cy="2032000"/>
-          </a:xfrm>
-          <a:prstGeom prst="rect">
-            <a:avLst/>
-          </a:prstGeom>
-          <a:solidFill>
-            <a:srgbClr val="2B2B2B"/>
-          </a:solidFill>
-          <a:ln w="15875">
-            <a:solidFill>
-              <a:srgbClr val="444444"/>
-            </a:solidFill>
-          </a:ln>
-          <a:effectLst/>
-        </p:spPr>
-        <p:style>
-          <a:lnRef idx="1">
-            <a:schemeClr val="accent1"/>
-          </a:lnRef>
-          <a:fillRef idx="3">
-            <a:schemeClr val="accent1"/>
-          </a:fillRef>
-          <a:effectRef idx="2">
-            <a:schemeClr val="accent1"/>
-          </a:effectRef>
-          <a:fontRef idx="minor">
-            <a:schemeClr val="lt1"/>
-          </a:fontRef>
-        </p:style>
-        <p:txBody>
-          <a:bodyPr rtlCol="0" anchor="ctr"/>
-          <a:lstStyle/>
-          <a:p>
-            <a:pPr algn="ctr"/>
-          </a:p>
-        </p:txBody>
-      </p:sp>
-      <p:sp>
-        <p:nvSpPr>
-          <p:cNvPr id="8" name="TextBox 7"/>
-          <p:cNvSpPr txBox="1"/>
-          <p:nvPr/>
-        </p:nvSpPr>
-        <p:spPr>
-          <a:xfrm>
-            <a:off x="711200" y="1676400"/>
-            <a:ext cx="5054600" cy="355600"/>
-          </a:xfrm>
-          <a:prstGeom prst="rect">
-            <a:avLst/>
-          </a:prstGeom>
-          <a:noFill/>
-        </p:spPr>
-        <p:txBody>
-          <a:bodyPr wrap="square" anchor="t" lIns="50800" rIns="50800" tIns="25400" bIns="25400">
-            <a:spAutoFit/>
-          </a:bodyPr>
-          <a:lstStyle/>
-          <a:p>
-            <a:pPr algn="l">
-              <a:spcAft>
-                <a:spcPts val="600"/>
-              </a:spcAft>
-            </a:pPr>
-            <a:r>
-              <a:rPr sz="1700" b="1">
-                <a:solidFill>
-                  <a:srgbClr val="B39DDB"/>
-                </a:solidFill>
-                <a:latin typeface="Sarabun"/>
-                <a:ea typeface="Sarabun"/>
-                <a:cs typeface="Sarabun"/>
-              </a:rPr>
-              <a:t>_status ยังเขียนทับได้ไหม?</a:t>
-            </a:r>
-          </a:p>
-        </p:txBody>
-      </p:sp>
-      <p:sp>
-        <p:nvSpPr>
-          <p:cNvPr id="9" name="TextBox 8"/>
-          <p:cNvSpPr txBox="1"/>
-          <p:nvPr/>
-        </p:nvSpPr>
-        <p:spPr>
-          <a:xfrm>
-            <a:off x="711200" y="2133600"/>
-            <a:ext cx="5054600" cy="1320800"/>
-          </a:xfrm>
-          <a:prstGeom prst="rect">
-            <a:avLst/>
-          </a:prstGeom>
-          <a:noFill/>
-        </p:spPr>
-        <p:txBody>
-          <a:bodyPr wrap="square" anchor="t" lIns="50800" rIns="50800" tIns="25400" bIns="25400">
-            <a:spAutoFit/>
-          </a:bodyPr>
-          <a:lstStyle/>
-          <a:p>
-            <a:pPr algn="l">
-              <a:spcAft>
-                <a:spcPts val="600"/>
-              </a:spcAft>
-            </a:pPr>
-            <a:r>
-              <a:rPr sz="1600" b="0">
-                <a:solidFill>
-                  <a:srgbClr val="FFFFFF"/>
-                </a:solidFill>
-                <a:latin typeface="Sarabun"/>
-                <a:ea typeface="Sarabun"/>
-                <a:cs typeface="Sarabun"/>
-              </a:rPr>
-              <a:t>ได้ Python ไม่มี private จริง · _ คือข้อตกลง · property ไม่มี setter กันการแก้ผ่าน .status · ต้องการมากขึ้นใช้ __status (name mangling)</a:t>
-            </a:r>
-          </a:p>
-        </p:txBody>
-      </p:sp>
-      <p:sp>
-        <p:nvSpPr>
-          <p:cNvPr id="10" name="Rectangle 9"/>
-          <p:cNvSpPr/>
-          <p:nvPr/>
-        </p:nvSpPr>
-        <p:spPr>
-          <a:xfrm>
-            <a:off x="6223000" y="1524000"/>
-            <a:ext cx="5461000" cy="2032000"/>
-          </a:xfrm>
-          <a:prstGeom prst="rect">
-            <a:avLst/>
-          </a:prstGeom>
-          <a:solidFill>
-            <a:srgbClr val="2B2B2B"/>
-          </a:solidFill>
-          <a:ln w="15875">
-            <a:solidFill>
-              <a:srgbClr val="444444"/>
-            </a:solidFill>
-          </a:ln>
-          <a:effectLst/>
-        </p:spPr>
-        <p:style>
-          <a:lnRef idx="1">
-            <a:schemeClr val="accent1"/>
-          </a:lnRef>
-          <a:fillRef idx="3">
-            <a:schemeClr val="accent1"/>
-          </a:fillRef>
-          <a:effectRef idx="2">
-            <a:schemeClr val="accent1"/>
-          </a:effectRef>
-          <a:fontRef idx="minor">
-            <a:schemeClr val="lt1"/>
-          </a:fontRef>
-        </p:style>
-        <p:txBody>
-          <a:bodyPr rtlCol="0" anchor="ctr"/>
-          <a:lstStyle/>
-          <a:p>
-            <a:pPr algn="ctr"/>
-          </a:p>
-        </p:txBody>
-      </p:sp>
-      <p:sp>
-        <p:nvSpPr>
-          <p:cNvPr id="11" name="TextBox 10"/>
-          <p:cNvSpPr txBox="1"/>
-          <p:nvPr/>
-        </p:nvSpPr>
-        <p:spPr>
-          <a:xfrm>
-            <a:off x="6426200" y="1676400"/>
-            <a:ext cx="5054600" cy="355600"/>
-          </a:xfrm>
-          <a:prstGeom prst="rect">
-            <a:avLst/>
-          </a:prstGeom>
-          <a:noFill/>
-        </p:spPr>
-        <p:txBody>
-          <a:bodyPr wrap="square" anchor="t" lIns="50800" rIns="50800" tIns="25400" bIns="25400">
-            <a:spAutoFit/>
-          </a:bodyPr>
-          <a:lstStyle/>
-          <a:p>
-            <a:pPr algn="l">
-              <a:spcAft>
-                <a:spcPts val="600"/>
-              </a:spcAft>
-            </a:pPr>
-            <a:r>
-              <a:rPr sz="1700" b="1">
-                <a:solidFill>
-                  <a:srgbClr val="B39DDB"/>
-                </a:solidFill>
-                <a:latin typeface="Sarabun"/>
-                <a:ea typeface="Sarabun"/>
-                <a:cs typeface="Sarabun"/>
-              </a:rPr>
-              <a:t>ทำไมไม่มี interface?</a:t>
-            </a:r>
-          </a:p>
-        </p:txBody>
-      </p:sp>
-      <p:sp>
-        <p:nvSpPr>
-          <p:cNvPr id="12" name="TextBox 11"/>
-          <p:cNvSpPr txBox="1"/>
-          <p:nvPr/>
-        </p:nvSpPr>
-        <p:spPr>
-          <a:xfrm>
-            <a:off x="6426200" y="2133600"/>
-            <a:ext cx="5054600" cy="1320800"/>
-          </a:xfrm>
-          <a:prstGeom prst="rect">
-            <a:avLst/>
-          </a:prstGeom>
-          <a:noFill/>
-        </p:spPr>
-        <p:txBody>
-          <a:bodyPr wrap="square" anchor="t" lIns="50800" rIns="50800" tIns="25400" bIns="25400">
-            <a:spAutoFit/>
-          </a:bodyPr>
-          <a:lstStyle/>
-          <a:p>
-            <a:pPr algn="l">
-              <a:spcAft>
-                <a:spcPts val="600"/>
-              </a:spcAft>
-            </a:pPr>
-            <a:r>
-              <a:rPr sz="1600" b="0">
-                <a:solidFill>
-                  <a:srgbClr val="FFFFFF"/>
-                </a:solidFill>
-                <a:latin typeface="Sarabun"/>
-                <a:ea typeface="Sarabun"/>
-                <a:cs typeface="Sarabun"/>
-              </a:rPr>
-              <a:t>Python ไม่มีคีย์เวิร์ด interface · ใช้ ABC + @abstractmethod ทำหน้าที่เดียวกัน</a:t>
-            </a:r>
-          </a:p>
-        </p:txBody>
-      </p:sp>
-      <p:sp>
-        <p:nvSpPr>
-          <p:cNvPr id="13" name="Rectangle 12"/>
-          <p:cNvSpPr/>
-          <p:nvPr/>
-        </p:nvSpPr>
-        <p:spPr>
-          <a:xfrm>
-            <a:off x="508000" y="3746500"/>
-            <a:ext cx="5461000" cy="2032000"/>
-          </a:xfrm>
-          <a:prstGeom prst="rect">
-            <a:avLst/>
-          </a:prstGeom>
-          <a:solidFill>
-            <a:srgbClr val="2B2B2B"/>
-          </a:solidFill>
-          <a:ln w="15875">
-            <a:solidFill>
-              <a:srgbClr val="444444"/>
-            </a:solidFill>
-          </a:ln>
-          <a:effectLst/>
-        </p:spPr>
-        <p:style>
-          <a:lnRef idx="1">
-            <a:schemeClr val="accent1"/>
-          </a:lnRef>
-          <a:fillRef idx="3">
-            <a:schemeClr val="accent1"/>
-          </a:fillRef>
-          <a:effectRef idx="2">
-            <a:schemeClr val="accent1"/>
-          </a:effectRef>
-          <a:fontRef idx="minor">
-            <a:schemeClr val="lt1"/>
-          </a:fontRef>
-        </p:style>
-        <p:txBody>
-          <a:bodyPr rtlCol="0" anchor="ctr"/>
-          <a:lstStyle/>
-          <a:p>
-            <a:pPr algn="ctr"/>
-          </a:p>
-        </p:txBody>
-      </p:sp>
-      <p:sp>
-        <p:nvSpPr>
-          <p:cNvPr id="14" name="TextBox 13"/>
-          <p:cNvSpPr txBox="1"/>
-          <p:nvPr/>
-        </p:nvSpPr>
-        <p:spPr>
-          <a:xfrm>
-            <a:off x="711200" y="3898900"/>
-            <a:ext cx="5054600" cy="355600"/>
-          </a:xfrm>
-          <a:prstGeom prst="rect">
-            <a:avLst/>
-          </a:prstGeom>
-          <a:noFill/>
-        </p:spPr>
-        <p:txBody>
-          <a:bodyPr wrap="square" anchor="t" lIns="50800" rIns="50800" tIns="25400" bIns="25400">
-            <a:spAutoFit/>
-          </a:bodyPr>
-          <a:lstStyle/>
-          <a:p>
-            <a:pPr algn="l">
-              <a:spcAft>
-                <a:spcPts val="600"/>
-              </a:spcAft>
-            </a:pPr>
-            <a:r>
-              <a:rPr sz="1700" b="1">
-                <a:solidFill>
-                  <a:srgbClr val="B39DDB"/>
-                </a:solidFill>
-                <a:latin typeface="Sarabun"/>
-                <a:ea typeface="Sarabun"/>
-                <a:cs typeface="Sarabun"/>
-              </a:rPr>
-              <a:t>มี overloading ไหม?</a:t>
-            </a:r>
-          </a:p>
-        </p:txBody>
-      </p:sp>
-      <p:sp>
-        <p:nvSpPr>
-          <p:cNvPr id="15" name="TextBox 14"/>
-          <p:cNvSpPr txBox="1"/>
-          <p:nvPr/>
-        </p:nvSpPr>
-        <p:spPr>
-          <a:xfrm>
-            <a:off x="711200" y="4356100"/>
-            <a:ext cx="5054600" cy="1320800"/>
-          </a:xfrm>
-          <a:prstGeom prst="rect">
-            <a:avLst/>
-          </a:prstGeom>
-          <a:noFill/>
-        </p:spPr>
-        <p:txBody>
-          <a:bodyPr wrap="square" anchor="t" lIns="50800" rIns="50800" tIns="25400" bIns="25400">
-            <a:spAutoFit/>
-          </a:bodyPr>
-          <a:lstStyle/>
-          <a:p>
-            <a:pPr algn="l">
-              <a:spcAft>
-                <a:spcPts val="600"/>
-              </a:spcAft>
-            </a:pPr>
-            <a:r>
-              <a:rPr sz="1600" b="0">
-                <a:solidFill>
-                  <a:srgbClr val="FFFFFF"/>
-                </a:solidFill>
-                <a:latin typeface="Sarabun"/>
-                <a:ea typeface="Sarabun"/>
-                <a:cs typeface="Sarabun"/>
-              </a:rPr>
-              <a:t>Python ไม่มี method overloading แบบ Java · ระบบนี้ใช้ overriding (เช่น home_url)</a:t>
-            </a:r>
-          </a:p>
-        </p:txBody>
-      </p:sp>
-      <p:sp>
-        <p:nvSpPr>
-          <p:cNvPr id="16" name="Rectangle 15"/>
-          <p:cNvSpPr/>
-          <p:nvPr/>
-        </p:nvSpPr>
-        <p:spPr>
-          <a:xfrm>
-            <a:off x="6223000" y="3746500"/>
-            <a:ext cx="5461000" cy="2032000"/>
-          </a:xfrm>
-          <a:prstGeom prst="rect">
-            <a:avLst/>
-          </a:prstGeom>
-          <a:solidFill>
-            <a:srgbClr val="2B2B2B"/>
-          </a:solidFill>
-          <a:ln w="15875">
-            <a:solidFill>
-              <a:srgbClr val="444444"/>
-            </a:solidFill>
-          </a:ln>
-          <a:effectLst/>
-        </p:spPr>
-        <p:style>
-          <a:lnRef idx="1">
-            <a:schemeClr val="accent1"/>
-          </a:lnRef>
-          <a:fillRef idx="3">
-            <a:schemeClr val="accent1"/>
-          </a:fillRef>
-          <a:effectRef idx="2">
-            <a:schemeClr val="accent1"/>
-          </a:effectRef>
-          <a:fontRef idx="minor">
-            <a:schemeClr val="lt1"/>
-          </a:fontRef>
-        </p:style>
-        <p:txBody>
-          <a:bodyPr rtlCol="0" anchor="ctr"/>
-          <a:lstStyle/>
-          <a:p>
-            <a:pPr algn="ctr"/>
-          </a:p>
-        </p:txBody>
-      </p:sp>
-      <p:sp>
-        <p:nvSpPr>
-          <p:cNvPr id="17" name="TextBox 16"/>
-          <p:cNvSpPr txBox="1"/>
-          <p:nvPr/>
-        </p:nvSpPr>
-        <p:spPr>
-          <a:xfrm>
-            <a:off x="6426200" y="3898900"/>
-            <a:ext cx="5054600" cy="355600"/>
-          </a:xfrm>
-          <a:prstGeom prst="rect">
-            <a:avLst/>
-          </a:prstGeom>
-          <a:noFill/>
-        </p:spPr>
-        <p:txBody>
-          <a:bodyPr wrap="square" anchor="t" lIns="50800" rIns="50800" tIns="25400" bIns="25400">
-            <a:spAutoFit/>
-          </a:bodyPr>
-          <a:lstStyle/>
-          <a:p>
-            <a:pPr algn="l">
-              <a:spcAft>
-                <a:spcPts val="600"/>
-              </a:spcAft>
-            </a:pPr>
-            <a:r>
-              <a:rPr sz="1700" b="1">
-                <a:solidFill>
-                  <a:srgbClr val="B39DDB"/>
-                </a:solidFill>
-                <a:latin typeface="Sarabun"/>
-                <a:ea typeface="Sarabun"/>
-                <a:cs typeface="Sarabun"/>
-              </a:rPr>
-              <a:t>composition vs aggregation?</a:t>
-            </a:r>
-          </a:p>
-        </p:txBody>
-      </p:sp>
-      <p:sp>
-        <p:nvSpPr>
-          <p:cNvPr id="18" name="TextBox 17"/>
-          <p:cNvSpPr txBox="1"/>
-          <p:nvPr/>
-        </p:nvSpPr>
-        <p:spPr>
-          <a:xfrm>
-            <a:off x="6426200" y="4356100"/>
-            <a:ext cx="5054600" cy="1320800"/>
-          </a:xfrm>
-          <a:prstGeom prst="rect">
-            <a:avLst/>
-          </a:prstGeom>
-          <a:noFill/>
-        </p:spPr>
-        <p:txBody>
-          <a:bodyPr wrap="square" anchor="t" lIns="50800" rIns="50800" tIns="25400" bIns="25400">
-            <a:spAutoFit/>
-          </a:bodyPr>
-          <a:lstStyle/>
-          <a:p>
-            <a:pPr algn="l">
-              <a:spcAft>
-                <a:spcPts val="600"/>
-              </a:spcAft>
-            </a:pPr>
-            <a:r>
-              <a:rPr sz="1600" b="0">
-                <a:solidFill>
-                  <a:srgbClr val="FFFFFF"/>
-                </a:solidFill>
-                <a:latin typeface="Sarabun"/>
-                <a:ea typeface="Sarabun"/>
-                <a:cs typeface="Sarabun"/>
-              </a:rPr>
-              <a:t>Case ถือ CaseAssignment เป็นของตัวเอง = composition · Schedule ยืมลิสต์นัดจาก repo = aggregation</a:t>
-            </a:r>
-          </a:p>
-        </p:txBody>
-      </p:sp>
-    </p:spTree>
-  </p:cSld>
-  <p:clrMapOvr>
-    <a:masterClrMapping/>
-  </p:clrMapOvr>
-</p:sld>
-</file>
-
 <file path=ppt/slides/slide14.xml><?xml version="1.0" encoding="utf-8"?>
 <p:sld xmlns:a="http://schemas.openxmlformats.org/drawingml/2006/main" xmlns:p="http://schemas.openxmlformats.org/presentationml/2006/main" xmlns:r="http://schemas.openxmlformats.org/officeDocument/2006/relationships">
   <p:cSld>
@@ -4798,6 +4049,755 @@
                 <a:ea typeface="Sarabun"/>
                 <a:cs typeface="Sarabun"/>
               </a:rPr>
+              <a:t>คำถามที่อาจถูกถาม</a:t>
+            </a:r>
+          </a:p>
+        </p:txBody>
+      </p:sp>
+      <p:sp>
+        <p:nvSpPr>
+          <p:cNvPr id="3" name="TextBox 2"/>
+          <p:cNvSpPr txBox="1"/>
+          <p:nvPr/>
+        </p:nvSpPr>
+        <p:spPr>
+          <a:xfrm>
+            <a:off x="508000" y="863600"/>
+            <a:ext cx="10922000" cy="330200"/>
+          </a:xfrm>
+          <a:prstGeom prst="rect">
+            <a:avLst/>
+          </a:prstGeom>
+          <a:noFill/>
+        </p:spPr>
+        <p:txBody>
+          <a:bodyPr wrap="square" anchor="t" lIns="50800" rIns="50800" tIns="25400" bIns="25400">
+            <a:spAutoFit/>
+          </a:bodyPr>
+          <a:lstStyle/>
+          <a:p>
+            <a:pPr algn="l">
+              <a:spcAft>
+                <a:spcPts val="600"/>
+              </a:spcAft>
+            </a:pPr>
+            <a:r>
+              <a:rPr sz="1500" b="0">
+                <a:solidFill>
+                  <a:srgbClr val="A6A6A6"/>
+                </a:solidFill>
+                <a:latin typeface="Sarabun"/>
+                <a:ea typeface="Sarabun"/>
+                <a:cs typeface="Sarabun"/>
+              </a:rPr>
+              <a:t>สไลด์สำรอง เปิดเมื่อถูกถาม</a:t>
+            </a:r>
+          </a:p>
+        </p:txBody>
+      </p:sp>
+      <p:sp>
+        <p:nvSpPr>
+          <p:cNvPr id="4" name="Rectangle 3"/>
+          <p:cNvSpPr/>
+          <p:nvPr/>
+        </p:nvSpPr>
+        <p:spPr>
+          <a:xfrm>
+            <a:off x="508000" y="1295400"/>
+            <a:ext cx="11176000" cy="19050"/>
+          </a:xfrm>
+          <a:prstGeom prst="rect">
+            <a:avLst/>
+          </a:prstGeom>
+          <a:solidFill>
+            <a:srgbClr val="444444"/>
+          </a:solidFill>
+          <a:ln>
+            <a:noFill/>
+          </a:ln>
+          <a:effectLst/>
+        </p:spPr>
+        <p:style>
+          <a:lnRef idx="1">
+            <a:schemeClr val="accent1"/>
+          </a:lnRef>
+          <a:fillRef idx="3">
+            <a:schemeClr val="accent1"/>
+          </a:fillRef>
+          <a:effectRef idx="2">
+            <a:schemeClr val="accent1"/>
+          </a:effectRef>
+          <a:fontRef idx="minor">
+            <a:schemeClr val="lt1"/>
+          </a:fontRef>
+        </p:style>
+        <p:txBody>
+          <a:bodyPr rtlCol="0" anchor="ctr"/>
+          <a:lstStyle/>
+          <a:p>
+            <a:pPr algn="ctr"/>
+          </a:p>
+        </p:txBody>
+      </p:sp>
+      <p:sp>
+        <p:nvSpPr>
+          <p:cNvPr id="5" name="Rectangle 4"/>
+          <p:cNvSpPr/>
+          <p:nvPr/>
+        </p:nvSpPr>
+        <p:spPr>
+          <a:xfrm>
+            <a:off x="508000" y="1282700"/>
+            <a:ext cx="1016000" cy="38100"/>
+          </a:xfrm>
+          <a:prstGeom prst="rect">
+            <a:avLst/>
+          </a:prstGeom>
+          <a:solidFill>
+            <a:srgbClr val="B39DDB"/>
+          </a:solidFill>
+          <a:ln>
+            <a:noFill/>
+          </a:ln>
+          <a:effectLst/>
+        </p:spPr>
+        <p:style>
+          <a:lnRef idx="1">
+            <a:schemeClr val="accent1"/>
+          </a:lnRef>
+          <a:fillRef idx="3">
+            <a:schemeClr val="accent1"/>
+          </a:fillRef>
+          <a:effectRef idx="2">
+            <a:schemeClr val="accent1"/>
+          </a:effectRef>
+          <a:fontRef idx="minor">
+            <a:schemeClr val="lt1"/>
+          </a:fontRef>
+        </p:style>
+        <p:txBody>
+          <a:bodyPr rtlCol="0" anchor="ctr"/>
+          <a:lstStyle/>
+          <a:p>
+            <a:pPr algn="ctr"/>
+          </a:p>
+        </p:txBody>
+      </p:sp>
+      <p:sp>
+        <p:nvSpPr>
+          <p:cNvPr id="6" name="TextBox 5"/>
+          <p:cNvSpPr txBox="1"/>
+          <p:nvPr/>
+        </p:nvSpPr>
+        <p:spPr>
+          <a:xfrm>
+            <a:off x="10922000" y="355600"/>
+            <a:ext cx="762000" cy="381000"/>
+          </a:xfrm>
+          <a:prstGeom prst="rect">
+            <a:avLst/>
+          </a:prstGeom>
+          <a:noFill/>
+        </p:spPr>
+        <p:txBody>
+          <a:bodyPr wrap="square" anchor="t" lIns="50800" rIns="50800" tIns="25400" bIns="25400">
+            <a:spAutoFit/>
+          </a:bodyPr>
+          <a:lstStyle/>
+          <a:p>
+            <a:pPr algn="r">
+              <a:spcAft>
+                <a:spcPts val="600"/>
+              </a:spcAft>
+            </a:pPr>
+            <a:r>
+              <a:rPr sz="1400" b="0">
+                <a:solidFill>
+                  <a:srgbClr val="A6A6A6"/>
+                </a:solidFill>
+                <a:latin typeface="Sarabun"/>
+                <a:ea typeface="Sarabun"/>
+                <a:cs typeface="Sarabun"/>
+              </a:rPr>
+              <a:t/>
+            </a:r>
+          </a:p>
+        </p:txBody>
+      </p:sp>
+      <p:sp>
+        <p:nvSpPr>
+          <p:cNvPr id="7" name="Rectangle 6"/>
+          <p:cNvSpPr/>
+          <p:nvPr/>
+        </p:nvSpPr>
+        <p:spPr>
+          <a:xfrm>
+            <a:off x="508000" y="1524000"/>
+            <a:ext cx="5461000" cy="2032000"/>
+          </a:xfrm>
+          <a:prstGeom prst="rect">
+            <a:avLst/>
+          </a:prstGeom>
+          <a:solidFill>
+            <a:srgbClr val="2B2B2B"/>
+          </a:solidFill>
+          <a:ln w="15875">
+            <a:solidFill>
+              <a:srgbClr val="444444"/>
+            </a:solidFill>
+          </a:ln>
+          <a:effectLst/>
+        </p:spPr>
+        <p:style>
+          <a:lnRef idx="1">
+            <a:schemeClr val="accent1"/>
+          </a:lnRef>
+          <a:fillRef idx="3">
+            <a:schemeClr val="accent1"/>
+          </a:fillRef>
+          <a:effectRef idx="2">
+            <a:schemeClr val="accent1"/>
+          </a:effectRef>
+          <a:fontRef idx="minor">
+            <a:schemeClr val="lt1"/>
+          </a:fontRef>
+        </p:style>
+        <p:txBody>
+          <a:bodyPr rtlCol="0" anchor="ctr"/>
+          <a:lstStyle/>
+          <a:p>
+            <a:pPr algn="ctr"/>
+          </a:p>
+        </p:txBody>
+      </p:sp>
+      <p:sp>
+        <p:nvSpPr>
+          <p:cNvPr id="8" name="TextBox 7"/>
+          <p:cNvSpPr txBox="1"/>
+          <p:nvPr/>
+        </p:nvSpPr>
+        <p:spPr>
+          <a:xfrm>
+            <a:off x="711200" y="1676400"/>
+            <a:ext cx="5054600" cy="355600"/>
+          </a:xfrm>
+          <a:prstGeom prst="rect">
+            <a:avLst/>
+          </a:prstGeom>
+          <a:noFill/>
+        </p:spPr>
+        <p:txBody>
+          <a:bodyPr wrap="square" anchor="t" lIns="50800" rIns="50800" tIns="25400" bIns="25400">
+            <a:spAutoFit/>
+          </a:bodyPr>
+          <a:lstStyle/>
+          <a:p>
+            <a:pPr algn="l">
+              <a:spcAft>
+                <a:spcPts val="600"/>
+              </a:spcAft>
+            </a:pPr>
+            <a:r>
+              <a:rPr sz="1700" b="1">
+                <a:solidFill>
+                  <a:srgbClr val="B39DDB"/>
+                </a:solidFill>
+                <a:latin typeface="Sarabun"/>
+                <a:ea typeface="Sarabun"/>
+                <a:cs typeface="Sarabun"/>
+              </a:rPr>
+              <a:t>_status ยังเขียนทับได้ไหม?</a:t>
+            </a:r>
+          </a:p>
+        </p:txBody>
+      </p:sp>
+      <p:sp>
+        <p:nvSpPr>
+          <p:cNvPr id="9" name="TextBox 8"/>
+          <p:cNvSpPr txBox="1"/>
+          <p:nvPr/>
+        </p:nvSpPr>
+        <p:spPr>
+          <a:xfrm>
+            <a:off x="711200" y="2133600"/>
+            <a:ext cx="5054600" cy="1320800"/>
+          </a:xfrm>
+          <a:prstGeom prst="rect">
+            <a:avLst/>
+          </a:prstGeom>
+          <a:noFill/>
+        </p:spPr>
+        <p:txBody>
+          <a:bodyPr wrap="square" anchor="t" lIns="50800" rIns="50800" tIns="25400" bIns="25400">
+            <a:spAutoFit/>
+          </a:bodyPr>
+          <a:lstStyle/>
+          <a:p>
+            <a:pPr algn="l">
+              <a:spcAft>
+                <a:spcPts val="600"/>
+              </a:spcAft>
+            </a:pPr>
+            <a:r>
+              <a:rPr sz="1600" b="0">
+                <a:solidFill>
+                  <a:srgbClr val="FFFFFF"/>
+                </a:solidFill>
+                <a:latin typeface="Sarabun"/>
+                <a:ea typeface="Sarabun"/>
+                <a:cs typeface="Sarabun"/>
+              </a:rPr>
+              <a:t>ได้ Python ไม่มี private จริง · _ คือข้อตกลง · property ไม่มี setter กันการแก้ผ่าน .status · ต้องการมากขึ้นใช้ __status (name mangling)</a:t>
+            </a:r>
+          </a:p>
+        </p:txBody>
+      </p:sp>
+      <p:sp>
+        <p:nvSpPr>
+          <p:cNvPr id="10" name="Rectangle 9"/>
+          <p:cNvSpPr/>
+          <p:nvPr/>
+        </p:nvSpPr>
+        <p:spPr>
+          <a:xfrm>
+            <a:off x="6223000" y="1524000"/>
+            <a:ext cx="5461000" cy="2032000"/>
+          </a:xfrm>
+          <a:prstGeom prst="rect">
+            <a:avLst/>
+          </a:prstGeom>
+          <a:solidFill>
+            <a:srgbClr val="2B2B2B"/>
+          </a:solidFill>
+          <a:ln w="15875">
+            <a:solidFill>
+              <a:srgbClr val="444444"/>
+            </a:solidFill>
+          </a:ln>
+          <a:effectLst/>
+        </p:spPr>
+        <p:style>
+          <a:lnRef idx="1">
+            <a:schemeClr val="accent1"/>
+          </a:lnRef>
+          <a:fillRef idx="3">
+            <a:schemeClr val="accent1"/>
+          </a:fillRef>
+          <a:effectRef idx="2">
+            <a:schemeClr val="accent1"/>
+          </a:effectRef>
+          <a:fontRef idx="minor">
+            <a:schemeClr val="lt1"/>
+          </a:fontRef>
+        </p:style>
+        <p:txBody>
+          <a:bodyPr rtlCol="0" anchor="ctr"/>
+          <a:lstStyle/>
+          <a:p>
+            <a:pPr algn="ctr"/>
+          </a:p>
+        </p:txBody>
+      </p:sp>
+      <p:sp>
+        <p:nvSpPr>
+          <p:cNvPr id="11" name="TextBox 10"/>
+          <p:cNvSpPr txBox="1"/>
+          <p:nvPr/>
+        </p:nvSpPr>
+        <p:spPr>
+          <a:xfrm>
+            <a:off x="6426200" y="1676400"/>
+            <a:ext cx="5054600" cy="355600"/>
+          </a:xfrm>
+          <a:prstGeom prst="rect">
+            <a:avLst/>
+          </a:prstGeom>
+          <a:noFill/>
+        </p:spPr>
+        <p:txBody>
+          <a:bodyPr wrap="square" anchor="t" lIns="50800" rIns="50800" tIns="25400" bIns="25400">
+            <a:spAutoFit/>
+          </a:bodyPr>
+          <a:lstStyle/>
+          <a:p>
+            <a:pPr algn="l">
+              <a:spcAft>
+                <a:spcPts val="600"/>
+              </a:spcAft>
+            </a:pPr>
+            <a:r>
+              <a:rPr sz="1700" b="1">
+                <a:solidFill>
+                  <a:srgbClr val="B39DDB"/>
+                </a:solidFill>
+                <a:latin typeface="Sarabun"/>
+                <a:ea typeface="Sarabun"/>
+                <a:cs typeface="Sarabun"/>
+              </a:rPr>
+              <a:t>ทำไมไม่มี interface?</a:t>
+            </a:r>
+          </a:p>
+        </p:txBody>
+      </p:sp>
+      <p:sp>
+        <p:nvSpPr>
+          <p:cNvPr id="12" name="TextBox 11"/>
+          <p:cNvSpPr txBox="1"/>
+          <p:nvPr/>
+        </p:nvSpPr>
+        <p:spPr>
+          <a:xfrm>
+            <a:off x="6426200" y="2133600"/>
+            <a:ext cx="5054600" cy="1320800"/>
+          </a:xfrm>
+          <a:prstGeom prst="rect">
+            <a:avLst/>
+          </a:prstGeom>
+          <a:noFill/>
+        </p:spPr>
+        <p:txBody>
+          <a:bodyPr wrap="square" anchor="t" lIns="50800" rIns="50800" tIns="25400" bIns="25400">
+            <a:spAutoFit/>
+          </a:bodyPr>
+          <a:lstStyle/>
+          <a:p>
+            <a:pPr algn="l">
+              <a:spcAft>
+                <a:spcPts val="600"/>
+              </a:spcAft>
+            </a:pPr>
+            <a:r>
+              <a:rPr sz="1600" b="0">
+                <a:solidFill>
+                  <a:srgbClr val="FFFFFF"/>
+                </a:solidFill>
+                <a:latin typeface="Sarabun"/>
+                <a:ea typeface="Sarabun"/>
+                <a:cs typeface="Sarabun"/>
+              </a:rPr>
+              <a:t>Python ไม่มีคีย์เวิร์ด interface · ใช้ ABC + @abstractmethod ทำหน้าที่เดียวกัน</a:t>
+            </a:r>
+          </a:p>
+        </p:txBody>
+      </p:sp>
+      <p:sp>
+        <p:nvSpPr>
+          <p:cNvPr id="13" name="Rectangle 12"/>
+          <p:cNvSpPr/>
+          <p:nvPr/>
+        </p:nvSpPr>
+        <p:spPr>
+          <a:xfrm>
+            <a:off x="508000" y="3746500"/>
+            <a:ext cx="5461000" cy="2032000"/>
+          </a:xfrm>
+          <a:prstGeom prst="rect">
+            <a:avLst/>
+          </a:prstGeom>
+          <a:solidFill>
+            <a:srgbClr val="2B2B2B"/>
+          </a:solidFill>
+          <a:ln w="15875">
+            <a:solidFill>
+              <a:srgbClr val="444444"/>
+            </a:solidFill>
+          </a:ln>
+          <a:effectLst/>
+        </p:spPr>
+        <p:style>
+          <a:lnRef idx="1">
+            <a:schemeClr val="accent1"/>
+          </a:lnRef>
+          <a:fillRef idx="3">
+            <a:schemeClr val="accent1"/>
+          </a:fillRef>
+          <a:effectRef idx="2">
+            <a:schemeClr val="accent1"/>
+          </a:effectRef>
+          <a:fontRef idx="minor">
+            <a:schemeClr val="lt1"/>
+          </a:fontRef>
+        </p:style>
+        <p:txBody>
+          <a:bodyPr rtlCol="0" anchor="ctr"/>
+          <a:lstStyle/>
+          <a:p>
+            <a:pPr algn="ctr"/>
+          </a:p>
+        </p:txBody>
+      </p:sp>
+      <p:sp>
+        <p:nvSpPr>
+          <p:cNvPr id="14" name="TextBox 13"/>
+          <p:cNvSpPr txBox="1"/>
+          <p:nvPr/>
+        </p:nvSpPr>
+        <p:spPr>
+          <a:xfrm>
+            <a:off x="711200" y="3898900"/>
+            <a:ext cx="5054600" cy="355600"/>
+          </a:xfrm>
+          <a:prstGeom prst="rect">
+            <a:avLst/>
+          </a:prstGeom>
+          <a:noFill/>
+        </p:spPr>
+        <p:txBody>
+          <a:bodyPr wrap="square" anchor="t" lIns="50800" rIns="50800" tIns="25400" bIns="25400">
+            <a:spAutoFit/>
+          </a:bodyPr>
+          <a:lstStyle/>
+          <a:p>
+            <a:pPr algn="l">
+              <a:spcAft>
+                <a:spcPts val="600"/>
+              </a:spcAft>
+            </a:pPr>
+            <a:r>
+              <a:rPr sz="1700" b="1">
+                <a:solidFill>
+                  <a:srgbClr val="B39DDB"/>
+                </a:solidFill>
+                <a:latin typeface="Sarabun"/>
+                <a:ea typeface="Sarabun"/>
+                <a:cs typeface="Sarabun"/>
+              </a:rPr>
+              <a:t>มี overloading ไหม?</a:t>
+            </a:r>
+          </a:p>
+        </p:txBody>
+      </p:sp>
+      <p:sp>
+        <p:nvSpPr>
+          <p:cNvPr id="15" name="TextBox 14"/>
+          <p:cNvSpPr txBox="1"/>
+          <p:nvPr/>
+        </p:nvSpPr>
+        <p:spPr>
+          <a:xfrm>
+            <a:off x="711200" y="4356100"/>
+            <a:ext cx="5054600" cy="1320800"/>
+          </a:xfrm>
+          <a:prstGeom prst="rect">
+            <a:avLst/>
+          </a:prstGeom>
+          <a:noFill/>
+        </p:spPr>
+        <p:txBody>
+          <a:bodyPr wrap="square" anchor="t" lIns="50800" rIns="50800" tIns="25400" bIns="25400">
+            <a:spAutoFit/>
+          </a:bodyPr>
+          <a:lstStyle/>
+          <a:p>
+            <a:pPr algn="l">
+              <a:spcAft>
+                <a:spcPts val="600"/>
+              </a:spcAft>
+            </a:pPr>
+            <a:r>
+              <a:rPr sz="1600" b="0">
+                <a:solidFill>
+                  <a:srgbClr val="FFFFFF"/>
+                </a:solidFill>
+                <a:latin typeface="Sarabun"/>
+                <a:ea typeface="Sarabun"/>
+                <a:cs typeface="Sarabun"/>
+              </a:rPr>
+              <a:t>Python ไม่มี method overloading แบบ Java · ระบบนี้ใช้ overriding (เช่น home_url)</a:t>
+            </a:r>
+          </a:p>
+        </p:txBody>
+      </p:sp>
+      <p:sp>
+        <p:nvSpPr>
+          <p:cNvPr id="16" name="Rectangle 15"/>
+          <p:cNvSpPr/>
+          <p:nvPr/>
+        </p:nvSpPr>
+        <p:spPr>
+          <a:xfrm>
+            <a:off x="6223000" y="3746500"/>
+            <a:ext cx="5461000" cy="2032000"/>
+          </a:xfrm>
+          <a:prstGeom prst="rect">
+            <a:avLst/>
+          </a:prstGeom>
+          <a:solidFill>
+            <a:srgbClr val="2B2B2B"/>
+          </a:solidFill>
+          <a:ln w="15875">
+            <a:solidFill>
+              <a:srgbClr val="444444"/>
+            </a:solidFill>
+          </a:ln>
+          <a:effectLst/>
+        </p:spPr>
+        <p:style>
+          <a:lnRef idx="1">
+            <a:schemeClr val="accent1"/>
+          </a:lnRef>
+          <a:fillRef idx="3">
+            <a:schemeClr val="accent1"/>
+          </a:fillRef>
+          <a:effectRef idx="2">
+            <a:schemeClr val="accent1"/>
+          </a:effectRef>
+          <a:fontRef idx="minor">
+            <a:schemeClr val="lt1"/>
+          </a:fontRef>
+        </p:style>
+        <p:txBody>
+          <a:bodyPr rtlCol="0" anchor="ctr"/>
+          <a:lstStyle/>
+          <a:p>
+            <a:pPr algn="ctr"/>
+          </a:p>
+        </p:txBody>
+      </p:sp>
+      <p:sp>
+        <p:nvSpPr>
+          <p:cNvPr id="17" name="TextBox 16"/>
+          <p:cNvSpPr txBox="1"/>
+          <p:nvPr/>
+        </p:nvSpPr>
+        <p:spPr>
+          <a:xfrm>
+            <a:off x="6426200" y="3898900"/>
+            <a:ext cx="5054600" cy="355600"/>
+          </a:xfrm>
+          <a:prstGeom prst="rect">
+            <a:avLst/>
+          </a:prstGeom>
+          <a:noFill/>
+        </p:spPr>
+        <p:txBody>
+          <a:bodyPr wrap="square" anchor="t" lIns="50800" rIns="50800" tIns="25400" bIns="25400">
+            <a:spAutoFit/>
+          </a:bodyPr>
+          <a:lstStyle/>
+          <a:p>
+            <a:pPr algn="l">
+              <a:spcAft>
+                <a:spcPts val="600"/>
+              </a:spcAft>
+            </a:pPr>
+            <a:r>
+              <a:rPr sz="1700" b="1">
+                <a:solidFill>
+                  <a:srgbClr val="B39DDB"/>
+                </a:solidFill>
+                <a:latin typeface="Sarabun"/>
+                <a:ea typeface="Sarabun"/>
+                <a:cs typeface="Sarabun"/>
+              </a:rPr>
+              <a:t>composition vs aggregation?</a:t>
+            </a:r>
+          </a:p>
+        </p:txBody>
+      </p:sp>
+      <p:sp>
+        <p:nvSpPr>
+          <p:cNvPr id="18" name="TextBox 17"/>
+          <p:cNvSpPr txBox="1"/>
+          <p:nvPr/>
+        </p:nvSpPr>
+        <p:spPr>
+          <a:xfrm>
+            <a:off x="6426200" y="4356100"/>
+            <a:ext cx="5054600" cy="1320800"/>
+          </a:xfrm>
+          <a:prstGeom prst="rect">
+            <a:avLst/>
+          </a:prstGeom>
+          <a:noFill/>
+        </p:spPr>
+        <p:txBody>
+          <a:bodyPr wrap="square" anchor="t" lIns="50800" rIns="50800" tIns="25400" bIns="25400">
+            <a:spAutoFit/>
+          </a:bodyPr>
+          <a:lstStyle/>
+          <a:p>
+            <a:pPr algn="l">
+              <a:spcAft>
+                <a:spcPts val="600"/>
+              </a:spcAft>
+            </a:pPr>
+            <a:r>
+              <a:rPr sz="1600" b="0">
+                <a:solidFill>
+                  <a:srgbClr val="FFFFFF"/>
+                </a:solidFill>
+                <a:latin typeface="Sarabun"/>
+                <a:ea typeface="Sarabun"/>
+                <a:cs typeface="Sarabun"/>
+              </a:rPr>
+              <a:t>Case ถือ CaseAssignment เป็นของตัวเอง = composition · Schedule ยืมลิสต์นัดจาก repo = aggregation</a:t>
+            </a:r>
+          </a:p>
+        </p:txBody>
+      </p:sp>
+    </p:spTree>
+  </p:cSld>
+  <p:clrMapOvr>
+    <a:masterClrMapping/>
+  </p:clrMapOvr>
+</p:sld>
+</file>
+
+<file path=ppt/slides/slide15.xml><?xml version="1.0" encoding="utf-8"?>
+<p:sld xmlns:a="http://schemas.openxmlformats.org/drawingml/2006/main" xmlns:p="http://schemas.openxmlformats.org/presentationml/2006/main" xmlns:r="http://schemas.openxmlformats.org/officeDocument/2006/relationships">
+  <p:cSld>
+    <p:bg>
+      <p:bgPr>
+        <a:solidFill>
+          <a:srgbClr val="1E1E1E"/>
+        </a:solidFill>
+        <a:effectLst/>
+      </p:bgPr>
+    </p:bg>
+    <p:spTree>
+      <p:nvGrpSpPr>
+        <p:cNvPr id="1" name=""/>
+        <p:cNvGrpSpPr/>
+        <p:nvPr/>
+      </p:nvGrpSpPr>
+      <p:grpSpPr/>
+      <p:sp>
+        <p:nvSpPr>
+          <p:cNvPr id="2" name="TextBox 1"/>
+          <p:cNvSpPr txBox="1"/>
+          <p:nvPr/>
+        </p:nvSpPr>
+        <p:spPr>
+          <a:xfrm>
+            <a:off x="508000" y="330200"/>
+            <a:ext cx="10414000" cy="558800"/>
+          </a:xfrm>
+          <a:prstGeom prst="rect">
+            <a:avLst/>
+          </a:prstGeom>
+          <a:noFill/>
+        </p:spPr>
+        <p:txBody>
+          <a:bodyPr wrap="square" anchor="t" lIns="50800" rIns="50800" tIns="25400" bIns="25400">
+            <a:spAutoFit/>
+          </a:bodyPr>
+          <a:lstStyle/>
+          <a:p>
+            <a:pPr algn="l">
+              <a:spcAft>
+                <a:spcPts val="600"/>
+              </a:spcAft>
+            </a:pPr>
+            <a:r>
+              <a:rPr sz="2800" b="1">
+                <a:solidFill>
+                  <a:srgbClr val="FFFFFF"/>
+                </a:solidFill>
+                <a:latin typeface="Sarabun"/>
+                <a:ea typeface="Sarabun"/>
+                <a:cs typeface="Sarabun"/>
+              </a:rPr>
               <a:t>dependency ไปทางเดียว: domain ไม่ import ชั้นอื่น</a:t>
             </a:r>
           </a:p>
@@ -5645,7 +5645,7 @@
 </p:sld>
 </file>
 
-<file path=ppt/slides/slide15.xml><?xml version="1.0" encoding="utf-8"?>
+<file path=ppt/slides/slide16.xml><?xml version="1.0" encoding="utf-8"?>
 <p:sld xmlns:a="http://schemas.openxmlformats.org/drawingml/2006/main" xmlns:p="http://schemas.openxmlformats.org/presentationml/2006/main" xmlns:r="http://schemas.openxmlformats.org/officeDocument/2006/relationships">
   <p:cSld>
     <p:bg>
@@ -6434,694 +6434,6 @@
 </p:sld>
 </file>
 
-<file path=ppt/slides/slide16.xml><?xml version="1.0" encoding="utf-8"?>
-<p:sld xmlns:a="http://schemas.openxmlformats.org/drawingml/2006/main" xmlns:p="http://schemas.openxmlformats.org/presentationml/2006/main" xmlns:r="http://schemas.openxmlformats.org/officeDocument/2006/relationships">
-  <p:cSld>
-    <p:bg>
-      <p:bgPr>
-        <a:solidFill>
-          <a:srgbClr val="1E1E1E"/>
-        </a:solidFill>
-        <a:effectLst/>
-      </p:bgPr>
-    </p:bg>
-    <p:spTree>
-      <p:nvGrpSpPr>
-        <p:cNvPr id="1" name=""/>
-        <p:cNvGrpSpPr/>
-        <p:nvPr/>
-      </p:nvGrpSpPr>
-      <p:grpSpPr/>
-      <p:sp>
-        <p:nvSpPr>
-          <p:cNvPr id="2" name="TextBox 1"/>
-          <p:cNvSpPr txBox="1"/>
-          <p:nvPr/>
-        </p:nvSpPr>
-        <p:spPr>
-          <a:xfrm>
-            <a:off x="508000" y="330200"/>
-            <a:ext cx="10414000" cy="558800"/>
-          </a:xfrm>
-          <a:prstGeom prst="rect">
-            <a:avLst/>
-          </a:prstGeom>
-          <a:noFill/>
-        </p:spPr>
-        <p:txBody>
-          <a:bodyPr wrap="square" anchor="t" lIns="50800" rIns="50800" tIns="25400" bIns="25400">
-            <a:spAutoFit/>
-          </a:bodyPr>
-          <a:lstStyle/>
-          <a:p>
-            <a:pPr algn="l">
-              <a:spcAft>
-                <a:spcPts val="600"/>
-              </a:spcAft>
-            </a:pPr>
-            <a:r>
-              <a:rPr sz="2800" b="1">
-                <a:solidFill>
-                  <a:srgbClr val="FFFFFF"/>
-                </a:solidFill>
-                <a:latin typeface="Sarabun"/>
-                <a:ea typeface="Sarabun"/>
-                <a:cs typeface="Sarabun"/>
-              </a:rPr>
-              <a:t>SQL ทั้งหมดอยู่ใน repository/ · กฎทั้งหมดอยู่ใน domain/</a:t>
-            </a:r>
-          </a:p>
-        </p:txBody>
-      </p:sp>
-      <p:sp>
-        <p:nvSpPr>
-          <p:cNvPr id="3" name="TextBox 2"/>
-          <p:cNvSpPr txBox="1"/>
-          <p:nvPr/>
-        </p:nvSpPr>
-        <p:spPr>
-          <a:xfrm>
-            <a:off x="508000" y="863600"/>
-            <a:ext cx="10922000" cy="330200"/>
-          </a:xfrm>
-          <a:prstGeom prst="rect">
-            <a:avLst/>
-          </a:prstGeom>
-          <a:noFill/>
-        </p:spPr>
-        <p:txBody>
-          <a:bodyPr wrap="square" anchor="t" lIns="50800" rIns="50800" tIns="25400" bIns="25400">
-            <a:spAutoFit/>
-          </a:bodyPr>
-          <a:lstStyle/>
-          <a:p>
-            <a:pPr algn="l">
-              <a:spcAft>
-                <a:spcPts val="600"/>
-              </a:spcAft>
-            </a:pPr>
-            <a:r>
-              <a:rPr sz="1500" b="0">
-                <a:solidFill>
-                  <a:srgbClr val="A6A6A6"/>
-                </a:solidFill>
-                <a:latin typeface="Sarabun"/>
-                <a:ea typeface="Sarabun"/>
-                <a:cs typeface="Sarabun"/>
-              </a:rPr>
-              <a:t>REPOSITORY PATTERN · Repository class ต่อตาราง</a:t>
-            </a:r>
-          </a:p>
-        </p:txBody>
-      </p:sp>
-      <p:sp>
-        <p:nvSpPr>
-          <p:cNvPr id="4" name="Rectangle 3"/>
-          <p:cNvSpPr/>
-          <p:nvPr/>
-        </p:nvSpPr>
-        <p:spPr>
-          <a:xfrm>
-            <a:off x="508000" y="1295400"/>
-            <a:ext cx="11176000" cy="19050"/>
-          </a:xfrm>
-          <a:prstGeom prst="rect">
-            <a:avLst/>
-          </a:prstGeom>
-          <a:solidFill>
-            <a:srgbClr val="444444"/>
-          </a:solidFill>
-          <a:ln>
-            <a:noFill/>
-          </a:ln>
-          <a:effectLst/>
-        </p:spPr>
-        <p:style>
-          <a:lnRef idx="1">
-            <a:schemeClr val="accent1"/>
-          </a:lnRef>
-          <a:fillRef idx="3">
-            <a:schemeClr val="accent1"/>
-          </a:fillRef>
-          <a:effectRef idx="2">
-            <a:schemeClr val="accent1"/>
-          </a:effectRef>
-          <a:fontRef idx="minor">
-            <a:schemeClr val="lt1"/>
-          </a:fontRef>
-        </p:style>
-        <p:txBody>
-          <a:bodyPr rtlCol="0" anchor="ctr"/>
-          <a:lstStyle/>
-          <a:p>
-            <a:pPr algn="ctr"/>
-          </a:p>
-        </p:txBody>
-      </p:sp>
-      <p:sp>
-        <p:nvSpPr>
-          <p:cNvPr id="5" name="Rectangle 4"/>
-          <p:cNvSpPr/>
-          <p:nvPr/>
-        </p:nvSpPr>
-        <p:spPr>
-          <a:xfrm>
-            <a:off x="508000" y="1282700"/>
-            <a:ext cx="1016000" cy="38100"/>
-          </a:xfrm>
-          <a:prstGeom prst="rect">
-            <a:avLst/>
-          </a:prstGeom>
-          <a:solidFill>
-            <a:srgbClr val="B39DDB"/>
-          </a:solidFill>
-          <a:ln>
-            <a:noFill/>
-          </a:ln>
-          <a:effectLst/>
-        </p:spPr>
-        <p:style>
-          <a:lnRef idx="1">
-            <a:schemeClr val="accent1"/>
-          </a:lnRef>
-          <a:fillRef idx="3">
-            <a:schemeClr val="accent1"/>
-          </a:fillRef>
-          <a:effectRef idx="2">
-            <a:schemeClr val="accent1"/>
-          </a:effectRef>
-          <a:fontRef idx="minor">
-            <a:schemeClr val="lt1"/>
-          </a:fontRef>
-        </p:style>
-        <p:txBody>
-          <a:bodyPr rtlCol="0" anchor="ctr"/>
-          <a:lstStyle/>
-          <a:p>
-            <a:pPr algn="ctr"/>
-          </a:p>
-        </p:txBody>
-      </p:sp>
-      <p:sp>
-        <p:nvSpPr>
-          <p:cNvPr id="6" name="TextBox 5"/>
-          <p:cNvSpPr txBox="1"/>
-          <p:nvPr/>
-        </p:nvSpPr>
-        <p:spPr>
-          <a:xfrm>
-            <a:off x="10922000" y="355600"/>
-            <a:ext cx="762000" cy="381000"/>
-          </a:xfrm>
-          <a:prstGeom prst="rect">
-            <a:avLst/>
-          </a:prstGeom>
-          <a:noFill/>
-        </p:spPr>
-        <p:txBody>
-          <a:bodyPr wrap="square" anchor="t" lIns="50800" rIns="50800" tIns="25400" bIns="25400">
-            <a:spAutoFit/>
-          </a:bodyPr>
-          <a:lstStyle/>
-          <a:p>
-            <a:pPr algn="r">
-              <a:spcAft>
-                <a:spcPts val="600"/>
-              </a:spcAft>
-            </a:pPr>
-            <a:r>
-              <a:rPr sz="1400" b="0">
-                <a:solidFill>
-                  <a:srgbClr val="A6A6A6"/>
-                </a:solidFill>
-                <a:latin typeface="Sarabun"/>
-                <a:ea typeface="Sarabun"/>
-                <a:cs typeface="Sarabun"/>
-              </a:rPr>
-              <a:t>B3</a:t>
-            </a:r>
-          </a:p>
-        </p:txBody>
-      </p:sp>
-      <p:sp>
-        <p:nvSpPr>
-          <p:cNvPr id="7" name="Rectangle 6"/>
-          <p:cNvSpPr/>
-          <p:nvPr/>
-        </p:nvSpPr>
-        <p:spPr>
-          <a:xfrm>
-            <a:off x="508000" y="1524000"/>
-            <a:ext cx="11176000" cy="787400"/>
-          </a:xfrm>
-          <a:prstGeom prst="rect">
-            <a:avLst/>
-          </a:prstGeom>
-          <a:solidFill>
-            <a:srgbClr val="161616"/>
-          </a:solidFill>
-          <a:ln w="15875">
-            <a:solidFill>
-              <a:srgbClr val="444444"/>
-            </a:solidFill>
-          </a:ln>
-          <a:effectLst/>
-        </p:spPr>
-        <p:style>
-          <a:lnRef idx="1">
-            <a:schemeClr val="accent1"/>
-          </a:lnRef>
-          <a:fillRef idx="3">
-            <a:schemeClr val="accent1"/>
-          </a:fillRef>
-          <a:effectRef idx="2">
-            <a:schemeClr val="accent1"/>
-          </a:effectRef>
-          <a:fontRef idx="minor">
-            <a:schemeClr val="lt1"/>
-          </a:fontRef>
-        </p:style>
-        <p:txBody>
-          <a:bodyPr rtlCol="0" anchor="ctr"/>
-          <a:lstStyle/>
-          <a:p>
-            <a:pPr algn="ctr"/>
-          </a:p>
-        </p:txBody>
-      </p:sp>
-      <p:sp>
-        <p:nvSpPr>
-          <p:cNvPr id="8" name="TextBox 7"/>
-          <p:cNvSpPr txBox="1"/>
-          <p:nvPr/>
-        </p:nvSpPr>
-        <p:spPr>
-          <a:xfrm>
-            <a:off x="635000" y="1625600"/>
-            <a:ext cx="10922000" cy="584200"/>
-          </a:xfrm>
-          <a:prstGeom prst="rect">
-            <a:avLst/>
-          </a:prstGeom>
-          <a:noFill/>
-        </p:spPr>
-        <p:txBody>
-          <a:bodyPr wrap="square" anchor="t" lIns="50800" rIns="50800" tIns="25400" bIns="25400">
-            <a:spAutoFit/>
-          </a:bodyPr>
-          <a:lstStyle/>
-          <a:p>
-            <a:pPr algn="l">
-              <a:spcAft>
-                <a:spcPts val="200"/>
-              </a:spcAft>
-            </a:pPr>
-            <a:r>
-              <a:rPr sz="1400" b="0">
-                <a:solidFill>
-                  <a:srgbClr val="FFFFFF"/>
-                </a:solidFill>
-                <a:latin typeface="Menlo"/>
-                <a:ea typeface="Sarabun"/>
-                <a:cs typeface="Sarabun"/>
-              </a:rPr>
-              <a:t>cases = CaseRepository(conn)        # ถือ connection ไว้หนึ่งตัว</a:t>
-            </a:r>
-          </a:p>
-          <a:p>
-            <a:pPr algn="l">
-              <a:spcAft>
-                <a:spcPts val="200"/>
-              </a:spcAft>
-            </a:pPr>
-            <a:r>
-              <a:rPr sz="1400" b="0">
-                <a:solidFill>
-                  <a:srgbClr val="FFFFFF"/>
-                </a:solidFill>
-                <a:latin typeface="Menlo"/>
-                <a:ea typeface="Sarabun"/>
-                <a:cs typeface="Sarabun"/>
-              </a:rPr>
-              <a:t>case = cases.get_by_id(case_id)     # คืน object ไม่ใช่ dict/row</a:t>
-            </a:r>
-          </a:p>
-        </p:txBody>
-      </p:sp>
-      <p:sp>
-        <p:nvSpPr>
-          <p:cNvPr id="9" name="Rectangle 8"/>
-          <p:cNvSpPr/>
-          <p:nvPr/>
-        </p:nvSpPr>
-        <p:spPr>
-          <a:xfrm>
-            <a:off x="508000" y="2463800"/>
-            <a:ext cx="11176000" cy="787400"/>
-          </a:xfrm>
-          <a:prstGeom prst="rect">
-            <a:avLst/>
-          </a:prstGeom>
-          <a:solidFill>
-            <a:srgbClr val="161616"/>
-          </a:solidFill>
-          <a:ln w="15875">
-            <a:solidFill>
-              <a:srgbClr val="444444"/>
-            </a:solidFill>
-          </a:ln>
-          <a:effectLst/>
-        </p:spPr>
-        <p:style>
-          <a:lnRef idx="1">
-            <a:schemeClr val="accent1"/>
-          </a:lnRef>
-          <a:fillRef idx="3">
-            <a:schemeClr val="accent1"/>
-          </a:fillRef>
-          <a:effectRef idx="2">
-            <a:schemeClr val="accent1"/>
-          </a:effectRef>
-          <a:fontRef idx="minor">
-            <a:schemeClr val="lt1"/>
-          </a:fontRef>
-        </p:style>
-        <p:txBody>
-          <a:bodyPr rtlCol="0" anchor="ctr"/>
-          <a:lstStyle/>
-          <a:p>
-            <a:pPr algn="ctr"/>
-          </a:p>
-        </p:txBody>
-      </p:sp>
-      <p:sp>
-        <p:nvSpPr>
-          <p:cNvPr id="10" name="TextBox 9"/>
-          <p:cNvSpPr txBox="1"/>
-          <p:nvPr/>
-        </p:nvSpPr>
-        <p:spPr>
-          <a:xfrm>
-            <a:off x="635000" y="2565400"/>
-            <a:ext cx="10922000" cy="584200"/>
-          </a:xfrm>
-          <a:prstGeom prst="rect">
-            <a:avLst/>
-          </a:prstGeom>
-          <a:noFill/>
-        </p:spPr>
-        <p:txBody>
-          <a:bodyPr wrap="square" anchor="t" lIns="50800" rIns="50800" tIns="25400" bIns="25400">
-            <a:spAutoFit/>
-          </a:bodyPr>
-          <a:lstStyle/>
-          <a:p>
-            <a:pPr algn="l">
-              <a:spcAft>
-                <a:spcPts val="200"/>
-              </a:spcAft>
-            </a:pPr>
-            <a:r>
-              <a:rPr sz="1400" b="0">
-                <a:solidFill>
-                  <a:srgbClr val="FFFFFF"/>
-                </a:solidFill>
-                <a:latin typeface="Menlo"/>
-                <a:ea typeface="Sarabun"/>
-                <a:cs typeface="Sarabun"/>
-              </a:rPr>
-              <a:t>_ROLE_TO_CLASS = {"lawyer": Lawyer, "manager": Manager, "admin": Admin}</a:t>
-            </a:r>
-          </a:p>
-          <a:p>
-            <a:pPr algn="l">
-              <a:spcAft>
-                <a:spcPts val="200"/>
-              </a:spcAft>
-            </a:pPr>
-            <a:r>
-              <a:rPr sz="1400" b="0">
-                <a:solidFill>
-                  <a:srgbClr val="FFFFFF"/>
-                </a:solidFill>
-                <a:latin typeface="Menlo"/>
-                <a:ea typeface="Sarabun"/>
-                <a:cs typeface="Sarabun"/>
-              </a:rPr>
-              <a:t>cls = _ROLE_TO_CLASS[row["role"]]   # อ่าน role แล้วสร้างให้ตรงคลาสลูก</a:t>
-            </a:r>
-          </a:p>
-        </p:txBody>
-      </p:sp>
-      <p:sp>
-        <p:nvSpPr>
-          <p:cNvPr id="11" name="Rectangle 10"/>
-          <p:cNvSpPr/>
-          <p:nvPr/>
-        </p:nvSpPr>
-        <p:spPr>
-          <a:xfrm>
-            <a:off x="508000" y="3403600"/>
-            <a:ext cx="11176000" cy="1270000"/>
-          </a:xfrm>
-          <a:prstGeom prst="rect">
-            <a:avLst/>
-          </a:prstGeom>
-          <a:solidFill>
-            <a:srgbClr val="161616"/>
-          </a:solidFill>
-          <a:ln w="15875">
-            <a:solidFill>
-              <a:srgbClr val="444444"/>
-            </a:solidFill>
-          </a:ln>
-          <a:effectLst/>
-        </p:spPr>
-        <p:style>
-          <a:lnRef idx="1">
-            <a:schemeClr val="accent1"/>
-          </a:lnRef>
-          <a:fillRef idx="3">
-            <a:schemeClr val="accent1"/>
-          </a:fillRef>
-          <a:effectRef idx="2">
-            <a:schemeClr val="accent1"/>
-          </a:effectRef>
-          <a:fontRef idx="minor">
-            <a:schemeClr val="lt1"/>
-          </a:fontRef>
-        </p:style>
-        <p:txBody>
-          <a:bodyPr rtlCol="0" anchor="ctr"/>
-          <a:lstStyle/>
-          <a:p>
-            <a:pPr algn="ctr"/>
-          </a:p>
-        </p:txBody>
-      </p:sp>
-      <p:sp>
-        <p:nvSpPr>
-          <p:cNvPr id="12" name="TextBox 11"/>
-          <p:cNvSpPr txBox="1"/>
-          <p:nvPr/>
-        </p:nvSpPr>
-        <p:spPr>
-          <a:xfrm>
-            <a:off x="635000" y="3505200"/>
-            <a:ext cx="10922000" cy="1066800"/>
-          </a:xfrm>
-          <a:prstGeom prst="rect">
-            <a:avLst/>
-          </a:prstGeom>
-          <a:noFill/>
-        </p:spPr>
-        <p:txBody>
-          <a:bodyPr wrap="square" anchor="t" lIns="50800" rIns="50800" tIns="25400" bIns="25400">
-            <a:spAutoFit/>
-          </a:bodyPr>
-          <a:lstStyle/>
-          <a:p>
-            <a:pPr algn="l">
-              <a:spcAft>
-                <a:spcPts val="200"/>
-              </a:spcAft>
-            </a:pPr>
-            <a:r>
-              <a:rPr sz="1400" b="0">
-                <a:solidFill>
-                  <a:srgbClr val="A6A6A6"/>
-                </a:solidFill>
-                <a:latin typeface="Menlo"/>
-                <a:ea typeface="Sarabun"/>
-                <a:cs typeface="Sarabun"/>
-              </a:rPr>
-              <a:t># repository/case_repo.py: peer repo ใช้ connection เดียวกัน</a:t>
-            </a:r>
-          </a:p>
-          <a:p>
-            <a:pPr algn="l">
-              <a:spcAft>
-                <a:spcPts val="200"/>
-              </a:spcAft>
-            </a:pPr>
-            <a:r>
-              <a:rPr sz="1400" b="0">
-                <a:solidFill>
-                  <a:srgbClr val="FFFFFF"/>
-                </a:solidFill>
-                <a:latin typeface="Menlo"/>
-                <a:ea typeface="Sarabun"/>
-                <a:cs typeface="Sarabun"/>
-              </a:rPr>
-              <a:t>def __init__(self, conn, clients=None, users=None):</a:t>
-            </a:r>
-          </a:p>
-          <a:p>
-            <a:pPr algn="l">
-              <a:spcAft>
-                <a:spcPts val="200"/>
-              </a:spcAft>
-            </a:pPr>
-            <a:r>
-              <a:rPr sz="1400" b="0">
-                <a:solidFill>
-                  <a:srgbClr val="FFFFFF"/>
-                </a:solidFill>
-                <a:latin typeface="Menlo"/>
-                <a:ea typeface="Sarabun"/>
-                <a:cs typeface="Sarabun"/>
-              </a:rPr>
-              <a:t>    self._conn = conn</a:t>
-            </a:r>
-          </a:p>
-          <a:p>
-            <a:pPr algn="l">
-              <a:spcAft>
-                <a:spcPts val="200"/>
-              </a:spcAft>
-            </a:pPr>
-            <a:r>
-              <a:rPr sz="1400" b="0">
-                <a:solidFill>
-                  <a:srgbClr val="FFFFFF"/>
-                </a:solidFill>
-                <a:latin typeface="Menlo"/>
-                <a:ea typeface="Sarabun"/>
-                <a:cs typeface="Sarabun"/>
-              </a:rPr>
-              <a:t>    self._clients = clients or ClientRepository(conn)</a:t>
-            </a:r>
-          </a:p>
-        </p:txBody>
-      </p:sp>
-      <p:sp>
-        <p:nvSpPr>
-          <p:cNvPr id="13" name="TextBox 12"/>
-          <p:cNvSpPr txBox="1"/>
-          <p:nvPr/>
-        </p:nvSpPr>
-        <p:spPr>
-          <a:xfrm>
-            <a:off x="508000" y="4889500"/>
-            <a:ext cx="11176000" cy="889000"/>
-          </a:xfrm>
-          <a:prstGeom prst="rect">
-            <a:avLst/>
-          </a:prstGeom>
-          <a:noFill/>
-        </p:spPr>
-        <p:txBody>
-          <a:bodyPr wrap="square" anchor="t" lIns="50800" rIns="50800" tIns="25400" bIns="25400">
-            <a:spAutoFit/>
-          </a:bodyPr>
-          <a:lstStyle/>
-          <a:p>
-            <a:pPr algn="l">
-              <a:spcAft>
-                <a:spcPts val="600"/>
-              </a:spcAft>
-            </a:pPr>
-            <a:r>
-              <a:rPr sz="1600" b="0">
-                <a:solidFill>
-                  <a:srgbClr val="FFFFFF"/>
-                </a:solidFill>
-                <a:latin typeface="Sarabun"/>
-                <a:ea typeface="Sarabun"/>
-                <a:cs typeface="Sarabun"/>
-              </a:rPr>
-              <a:t>• ทำไมไม่ใช้ ORM: โปรเจกต์เล็ก SQL ตรงๆ อ่านง่ายกว่า</a:t>
-            </a:r>
-          </a:p>
-          <a:p>
-            <a:pPr algn="l">
-              <a:spcAft>
-                <a:spcPts val="600"/>
-              </a:spcAft>
-            </a:pPr>
-            <a:r>
-              <a:rPr sz="1600" b="0">
-                <a:solidFill>
-                  <a:srgbClr val="FFFFFF"/>
-                </a:solidFill>
-                <a:latin typeface="Sarabun"/>
-                <a:ea typeface="Sarabun"/>
-                <a:cs typeface="Sarabun"/>
-              </a:rPr>
-              <a:t>• ย้ายฐานข้อมูล: แก้ที่ repository/ ที่เดียว</a:t>
-            </a:r>
-          </a:p>
-        </p:txBody>
-      </p:sp>
-      <p:sp>
-        <p:nvSpPr>
-          <p:cNvPr id="14" name="TextBox 13"/>
-          <p:cNvSpPr txBox="1"/>
-          <p:nvPr/>
-        </p:nvSpPr>
-        <p:spPr>
-          <a:xfrm>
-            <a:off x="508000" y="6070600"/>
-            <a:ext cx="11176000" cy="279400"/>
-          </a:xfrm>
-          <a:prstGeom prst="rect">
-            <a:avLst/>
-          </a:prstGeom>
-          <a:noFill/>
-        </p:spPr>
-        <p:txBody>
-          <a:bodyPr wrap="square" anchor="t" lIns="50800" rIns="50800" tIns="25400" bIns="25400">
-            <a:spAutoFit/>
-          </a:bodyPr>
-          <a:lstStyle/>
-          <a:p>
-            <a:pPr algn="l">
-              <a:spcAft>
-                <a:spcPts val="600"/>
-              </a:spcAft>
-            </a:pPr>
-            <a:r>
-              <a:rPr sz="1200" b="0">
-                <a:solidFill>
-                  <a:srgbClr val="A6A6A6"/>
-                </a:solidFill>
-                <a:latin typeface="Sarabun"/>
-                <a:ea typeface="Sarabun"/>
-                <a:cs typeface="Sarabun"/>
-              </a:rPr>
-              <a:t>อ้างอิง: repository/case_repo.py · repository/user_repo.py</a:t>
-            </a:r>
-          </a:p>
-        </p:txBody>
-      </p:sp>
-    </p:spTree>
-  </p:cSld>
-  <p:clrMapOvr>
-    <a:masterClrMapping/>
-  </p:clrMapOvr>
-</p:sld>
-</file>
-
 <file path=ppt/slides/slide17.xml><?xml version="1.0" encoding="utf-8"?>
 <p:sld xmlns:a="http://schemas.openxmlformats.org/drawingml/2006/main" xmlns:p="http://schemas.openxmlformats.org/presentationml/2006/main" xmlns:r="http://schemas.openxmlformats.org/officeDocument/2006/relationships">
   <p:cSld>
@@ -7176,7 +6488,7 @@
                 <a:ea typeface="Sarabun"/>
                 <a:cs typeface="Sarabun"/>
               </a:rPr>
-              <a:t>flow เดียวกันบนหน้าจอจริง</a:t>
+              <a:t>SQL ทั้งหมดอยู่ใน repository/ · กฎทั้งหมดอยู่ใน domain/</a:t>
             </a:r>
           </a:p>
         </p:txBody>
@@ -7217,7 +6529,7 @@
                 <a:ea typeface="Sarabun"/>
                 <a:cs typeface="Sarabun"/>
               </a:rPr>
-              <a:t>มอบหมาย → รับ / ปฏิเสธ → จัดการคดี</a:t>
+              <a:t>REPOSITORY PATTERN · Repository class ต่อตาราง</a:t>
             </a:r>
           </a:p>
         </p:txBody>
@@ -7346,21 +6658,372 @@
                 <a:ea typeface="Sarabun"/>
                 <a:cs typeface="Sarabun"/>
               </a:rPr>
-              <a:t>B4</a:t>
-            </a:r>
-          </a:p>
-        </p:txBody>
-      </p:sp>
-      <p:sp>
-        <p:nvSpPr>
-          <p:cNvPr id="7" name="TextBox 6"/>
+              <a:t>B3</a:t>
+            </a:r>
+          </a:p>
+        </p:txBody>
+      </p:sp>
+      <p:sp>
+        <p:nvSpPr>
+          <p:cNvPr id="7" name="Rectangle 6"/>
+          <p:cNvSpPr/>
+          <p:nvPr/>
+        </p:nvSpPr>
+        <p:spPr>
+          <a:xfrm>
+            <a:off x="508000" y="1524000"/>
+            <a:ext cx="11176000" cy="787400"/>
+          </a:xfrm>
+          <a:prstGeom prst="rect">
+            <a:avLst/>
+          </a:prstGeom>
+          <a:solidFill>
+            <a:srgbClr val="161616"/>
+          </a:solidFill>
+          <a:ln w="15875">
+            <a:solidFill>
+              <a:srgbClr val="444444"/>
+            </a:solidFill>
+          </a:ln>
+          <a:effectLst/>
+        </p:spPr>
+        <p:style>
+          <a:lnRef idx="1">
+            <a:schemeClr val="accent1"/>
+          </a:lnRef>
+          <a:fillRef idx="3">
+            <a:schemeClr val="accent1"/>
+          </a:fillRef>
+          <a:effectRef idx="2">
+            <a:schemeClr val="accent1"/>
+          </a:effectRef>
+          <a:fontRef idx="minor">
+            <a:schemeClr val="lt1"/>
+          </a:fontRef>
+        </p:style>
+        <p:txBody>
+          <a:bodyPr rtlCol="0" anchor="ctr"/>
+          <a:lstStyle/>
+          <a:p>
+            <a:pPr algn="ctr"/>
+          </a:p>
+        </p:txBody>
+      </p:sp>
+      <p:sp>
+        <p:nvSpPr>
+          <p:cNvPr id="8" name="TextBox 7"/>
           <p:cNvSpPr txBox="1"/>
           <p:nvPr/>
         </p:nvSpPr>
         <p:spPr>
           <a:xfrm>
-            <a:off x="508000" y="1498600"/>
-            <a:ext cx="3556000" cy="330200"/>
+            <a:off x="635000" y="1625600"/>
+            <a:ext cx="10922000" cy="584200"/>
+          </a:xfrm>
+          <a:prstGeom prst="rect">
+            <a:avLst/>
+          </a:prstGeom>
+          <a:noFill/>
+        </p:spPr>
+        <p:txBody>
+          <a:bodyPr wrap="square" anchor="t" lIns="50800" rIns="50800" tIns="25400" bIns="25400">
+            <a:spAutoFit/>
+          </a:bodyPr>
+          <a:lstStyle/>
+          <a:p>
+            <a:pPr algn="l">
+              <a:spcAft>
+                <a:spcPts val="200"/>
+              </a:spcAft>
+            </a:pPr>
+            <a:r>
+              <a:rPr sz="1400" b="0">
+                <a:solidFill>
+                  <a:srgbClr val="FFFFFF"/>
+                </a:solidFill>
+                <a:latin typeface="Menlo"/>
+                <a:ea typeface="Sarabun"/>
+                <a:cs typeface="Sarabun"/>
+              </a:rPr>
+              <a:t>cases = CaseRepository(conn)        # ถือ connection ไว้หนึ่งตัว</a:t>
+            </a:r>
+          </a:p>
+          <a:p>
+            <a:pPr algn="l">
+              <a:spcAft>
+                <a:spcPts val="200"/>
+              </a:spcAft>
+            </a:pPr>
+            <a:r>
+              <a:rPr sz="1400" b="0">
+                <a:solidFill>
+                  <a:srgbClr val="FFFFFF"/>
+                </a:solidFill>
+                <a:latin typeface="Menlo"/>
+                <a:ea typeface="Sarabun"/>
+                <a:cs typeface="Sarabun"/>
+              </a:rPr>
+              <a:t>case = cases.get_by_id(case_id)     # คืน object ไม่ใช่ dict/row</a:t>
+            </a:r>
+          </a:p>
+        </p:txBody>
+      </p:sp>
+      <p:sp>
+        <p:nvSpPr>
+          <p:cNvPr id="9" name="Rectangle 8"/>
+          <p:cNvSpPr/>
+          <p:nvPr/>
+        </p:nvSpPr>
+        <p:spPr>
+          <a:xfrm>
+            <a:off x="508000" y="2463800"/>
+            <a:ext cx="11176000" cy="787400"/>
+          </a:xfrm>
+          <a:prstGeom prst="rect">
+            <a:avLst/>
+          </a:prstGeom>
+          <a:solidFill>
+            <a:srgbClr val="161616"/>
+          </a:solidFill>
+          <a:ln w="15875">
+            <a:solidFill>
+              <a:srgbClr val="444444"/>
+            </a:solidFill>
+          </a:ln>
+          <a:effectLst/>
+        </p:spPr>
+        <p:style>
+          <a:lnRef idx="1">
+            <a:schemeClr val="accent1"/>
+          </a:lnRef>
+          <a:fillRef idx="3">
+            <a:schemeClr val="accent1"/>
+          </a:fillRef>
+          <a:effectRef idx="2">
+            <a:schemeClr val="accent1"/>
+          </a:effectRef>
+          <a:fontRef idx="minor">
+            <a:schemeClr val="lt1"/>
+          </a:fontRef>
+        </p:style>
+        <p:txBody>
+          <a:bodyPr rtlCol="0" anchor="ctr"/>
+          <a:lstStyle/>
+          <a:p>
+            <a:pPr algn="ctr"/>
+          </a:p>
+        </p:txBody>
+      </p:sp>
+      <p:sp>
+        <p:nvSpPr>
+          <p:cNvPr id="10" name="TextBox 9"/>
+          <p:cNvSpPr txBox="1"/>
+          <p:nvPr/>
+        </p:nvSpPr>
+        <p:spPr>
+          <a:xfrm>
+            <a:off x="635000" y="2565400"/>
+            <a:ext cx="10922000" cy="584200"/>
+          </a:xfrm>
+          <a:prstGeom prst="rect">
+            <a:avLst/>
+          </a:prstGeom>
+          <a:noFill/>
+        </p:spPr>
+        <p:txBody>
+          <a:bodyPr wrap="square" anchor="t" lIns="50800" rIns="50800" tIns="25400" bIns="25400">
+            <a:spAutoFit/>
+          </a:bodyPr>
+          <a:lstStyle/>
+          <a:p>
+            <a:pPr algn="l">
+              <a:spcAft>
+                <a:spcPts val="200"/>
+              </a:spcAft>
+            </a:pPr>
+            <a:r>
+              <a:rPr sz="1400" b="0">
+                <a:solidFill>
+                  <a:srgbClr val="FFFFFF"/>
+                </a:solidFill>
+                <a:latin typeface="Menlo"/>
+                <a:ea typeface="Sarabun"/>
+                <a:cs typeface="Sarabun"/>
+              </a:rPr>
+              <a:t>_ROLE_TO_CLASS = {"lawyer": Lawyer, "manager": Manager, "admin": Admin}</a:t>
+            </a:r>
+          </a:p>
+          <a:p>
+            <a:pPr algn="l">
+              <a:spcAft>
+                <a:spcPts val="200"/>
+              </a:spcAft>
+            </a:pPr>
+            <a:r>
+              <a:rPr sz="1400" b="0">
+                <a:solidFill>
+                  <a:srgbClr val="FFFFFF"/>
+                </a:solidFill>
+                <a:latin typeface="Menlo"/>
+                <a:ea typeface="Sarabun"/>
+                <a:cs typeface="Sarabun"/>
+              </a:rPr>
+              <a:t>cls = _ROLE_TO_CLASS[row["role"]]   # อ่าน role แล้วสร้างให้ตรงคลาสลูก</a:t>
+            </a:r>
+          </a:p>
+        </p:txBody>
+      </p:sp>
+      <p:sp>
+        <p:nvSpPr>
+          <p:cNvPr id="11" name="Rectangle 10"/>
+          <p:cNvSpPr/>
+          <p:nvPr/>
+        </p:nvSpPr>
+        <p:spPr>
+          <a:xfrm>
+            <a:off x="508000" y="3403600"/>
+            <a:ext cx="11176000" cy="1270000"/>
+          </a:xfrm>
+          <a:prstGeom prst="rect">
+            <a:avLst/>
+          </a:prstGeom>
+          <a:solidFill>
+            <a:srgbClr val="161616"/>
+          </a:solidFill>
+          <a:ln w="15875">
+            <a:solidFill>
+              <a:srgbClr val="444444"/>
+            </a:solidFill>
+          </a:ln>
+          <a:effectLst/>
+        </p:spPr>
+        <p:style>
+          <a:lnRef idx="1">
+            <a:schemeClr val="accent1"/>
+          </a:lnRef>
+          <a:fillRef idx="3">
+            <a:schemeClr val="accent1"/>
+          </a:fillRef>
+          <a:effectRef idx="2">
+            <a:schemeClr val="accent1"/>
+          </a:effectRef>
+          <a:fontRef idx="minor">
+            <a:schemeClr val="lt1"/>
+          </a:fontRef>
+        </p:style>
+        <p:txBody>
+          <a:bodyPr rtlCol="0" anchor="ctr"/>
+          <a:lstStyle/>
+          <a:p>
+            <a:pPr algn="ctr"/>
+          </a:p>
+        </p:txBody>
+      </p:sp>
+      <p:sp>
+        <p:nvSpPr>
+          <p:cNvPr id="12" name="TextBox 11"/>
+          <p:cNvSpPr txBox="1"/>
+          <p:nvPr/>
+        </p:nvSpPr>
+        <p:spPr>
+          <a:xfrm>
+            <a:off x="635000" y="3505200"/>
+            <a:ext cx="10922000" cy="1066800"/>
+          </a:xfrm>
+          <a:prstGeom prst="rect">
+            <a:avLst/>
+          </a:prstGeom>
+          <a:noFill/>
+        </p:spPr>
+        <p:txBody>
+          <a:bodyPr wrap="square" anchor="t" lIns="50800" rIns="50800" tIns="25400" bIns="25400">
+            <a:spAutoFit/>
+          </a:bodyPr>
+          <a:lstStyle/>
+          <a:p>
+            <a:pPr algn="l">
+              <a:spcAft>
+                <a:spcPts val="200"/>
+              </a:spcAft>
+            </a:pPr>
+            <a:r>
+              <a:rPr sz="1400" b="0">
+                <a:solidFill>
+                  <a:srgbClr val="A6A6A6"/>
+                </a:solidFill>
+                <a:latin typeface="Menlo"/>
+                <a:ea typeface="Sarabun"/>
+                <a:cs typeface="Sarabun"/>
+              </a:rPr>
+              <a:t># repository/case_repo.py: peer repo ใช้ connection เดียวกัน</a:t>
+            </a:r>
+          </a:p>
+          <a:p>
+            <a:pPr algn="l">
+              <a:spcAft>
+                <a:spcPts val="200"/>
+              </a:spcAft>
+            </a:pPr>
+            <a:r>
+              <a:rPr sz="1400" b="0">
+                <a:solidFill>
+                  <a:srgbClr val="FFFFFF"/>
+                </a:solidFill>
+                <a:latin typeface="Menlo"/>
+                <a:ea typeface="Sarabun"/>
+                <a:cs typeface="Sarabun"/>
+              </a:rPr>
+              <a:t>def __init__(self, conn, clients=None, users=None):</a:t>
+            </a:r>
+          </a:p>
+          <a:p>
+            <a:pPr algn="l">
+              <a:spcAft>
+                <a:spcPts val="200"/>
+              </a:spcAft>
+            </a:pPr>
+            <a:r>
+              <a:rPr sz="1400" b="0">
+                <a:solidFill>
+                  <a:srgbClr val="FFFFFF"/>
+                </a:solidFill>
+                <a:latin typeface="Menlo"/>
+                <a:ea typeface="Sarabun"/>
+                <a:cs typeface="Sarabun"/>
+              </a:rPr>
+              <a:t>    self._conn = conn</a:t>
+            </a:r>
+          </a:p>
+          <a:p>
+            <a:pPr algn="l">
+              <a:spcAft>
+                <a:spcPts val="200"/>
+              </a:spcAft>
+            </a:pPr>
+            <a:r>
+              <a:rPr sz="1400" b="0">
+                <a:solidFill>
+                  <a:srgbClr val="FFFFFF"/>
+                </a:solidFill>
+                <a:latin typeface="Menlo"/>
+                <a:ea typeface="Sarabun"/>
+                <a:cs typeface="Sarabun"/>
+              </a:rPr>
+              <a:t>    self._clients = clients or ClientRepository(conn)</a:t>
+            </a:r>
+          </a:p>
+        </p:txBody>
+      </p:sp>
+      <p:sp>
+        <p:nvSpPr>
+          <p:cNvPr id="13" name="TextBox 12"/>
+          <p:cNvSpPr txBox="1"/>
+          <p:nvPr/>
+        </p:nvSpPr>
+        <p:spPr>
+          <a:xfrm>
+            <a:off x="508000" y="4889500"/>
+            <a:ext cx="11176000" cy="889000"/>
           </a:xfrm>
           <a:prstGeom prst="rect">
             <a:avLst/>
@@ -7379,150 +7042,17 @@
               </a:spcAft>
             </a:pPr>
             <a:r>
-              <a:rPr sz="1600" b="1">
-                <a:solidFill>
-                  <a:srgbClr val="B39DDB"/>
+              <a:rPr sz="1600" b="0">
+                <a:solidFill>
+                  <a:srgbClr val="FFFFFF"/>
                 </a:solidFill>
                 <a:latin typeface="Sarabun"/>
                 <a:ea typeface="Sarabun"/>
                 <a:cs typeface="Sarabun"/>
               </a:rPr>
-              <a:t>1. มอบหมายทนาย</a:t>
-            </a:r>
-          </a:p>
-        </p:txBody>
-      </p:sp>
-      <p:sp>
-        <p:nvSpPr>
-          <p:cNvPr id="8" name="Rectangle 7"/>
-          <p:cNvSpPr/>
-          <p:nvPr/>
-        </p:nvSpPr>
-        <p:spPr>
-          <a:xfrm>
-            <a:off x="488950" y="2286171"/>
-            <a:ext cx="3594100" cy="2412657"/>
-          </a:xfrm>
-          <a:prstGeom prst="rect">
-            <a:avLst/>
-          </a:prstGeom>
-          <a:solidFill>
-            <a:srgbClr val="444444"/>
-          </a:solidFill>
-          <a:ln>
-            <a:noFill/>
-          </a:ln>
-          <a:effectLst/>
-        </p:spPr>
-        <p:style>
-          <a:lnRef idx="1">
-            <a:schemeClr val="accent1"/>
-          </a:lnRef>
-          <a:fillRef idx="3">
-            <a:schemeClr val="accent1"/>
-          </a:fillRef>
-          <a:effectRef idx="2">
-            <a:schemeClr val="accent1"/>
-          </a:effectRef>
-          <a:fontRef idx="minor">
-            <a:schemeClr val="lt1"/>
-          </a:fontRef>
-        </p:style>
-        <p:txBody>
-          <a:bodyPr rtlCol="0" anchor="ctr"/>
-          <a:lstStyle/>
-          <a:p>
-            <a:pPr algn="ctr"/>
-          </a:p>
-        </p:txBody>
-      </p:sp>
-      <p:pic>
-        <p:nvPicPr>
-          <p:cNvPr id="9" name="Picture 8" descr="manager_assign.png"/>
-          <p:cNvPicPr>
-            <a:picLocks noChangeAspect="1"/>
-          </p:cNvPicPr>
-          <p:nvPr/>
-        </p:nvPicPr>
-        <p:blipFill>
-          <a:blip r:embed="rId3"/>
-          <a:srcRect b="20000"/>
-          <a:stretch>
-            <a:fillRect/>
-          </a:stretch>
-        </p:blipFill>
-        <p:spPr>
-          <a:xfrm>
-            <a:off x="508000" y="2305221"/>
-            <a:ext cx="3556000" cy="2374557"/>
-          </a:xfrm>
-          <a:prstGeom prst="rect">
-            <a:avLst/>
-          </a:prstGeom>
-        </p:spPr>
-      </p:pic>
-      <p:sp>
-        <p:nvSpPr>
-          <p:cNvPr id="10" name="TextBox 9"/>
-          <p:cNvSpPr txBox="1"/>
-          <p:nvPr/>
-        </p:nvSpPr>
-        <p:spPr>
-          <a:xfrm>
-            <a:off x="508000" y="5181600"/>
-            <a:ext cx="3556000" cy="558800"/>
-          </a:xfrm>
-          <a:prstGeom prst="rect">
-            <a:avLst/>
-          </a:prstGeom>
-          <a:noFill/>
-        </p:spPr>
-        <p:txBody>
-          <a:bodyPr wrap="square" anchor="t" lIns="50800" rIns="50800" tIns="25400" bIns="25400">
-            <a:spAutoFit/>
-          </a:bodyPr>
-          <a:lstStyle/>
-          <a:p>
-            <a:pPr algn="ctr">
-              <a:spcAft>
-                <a:spcPts val="600"/>
-              </a:spcAft>
-            </a:pPr>
-            <a:r>
-              <a:rPr sz="1400" b="0">
-                <a:solidFill>
-                  <a:srgbClr val="A6A6A6"/>
-                </a:solidFill>
-                <a:latin typeface="Sarabun"/>
-                <a:ea typeface="Sarabun"/>
-                <a:cs typeface="Sarabun"/>
-              </a:rPr>
-              <a:t>ผู้จัดการเห็นภาระงานทุกคนก่อนเลือก</a:t>
-            </a:r>
-          </a:p>
-        </p:txBody>
-      </p:sp>
-      <p:sp>
-        <p:nvSpPr>
-          <p:cNvPr id="11" name="TextBox 10"/>
-          <p:cNvSpPr txBox="1"/>
-          <p:nvPr/>
-        </p:nvSpPr>
-        <p:spPr>
-          <a:xfrm>
-            <a:off x="4318000" y="1498600"/>
-            <a:ext cx="3556000" cy="330200"/>
-          </a:xfrm>
-          <a:prstGeom prst="rect">
-            <a:avLst/>
-          </a:prstGeom>
-          <a:noFill/>
-        </p:spPr>
-        <p:txBody>
-          <a:bodyPr wrap="square" anchor="t" lIns="50800" rIns="50800" tIns="25400" bIns="25400">
-            <a:spAutoFit/>
-          </a:bodyPr>
-          <a:lstStyle/>
+              <a:t>• ทำไมไม่ใช้ ORM: โปรเจกต์เล็ก SQL ตรงๆ อ่านง่ายกว่า</a:t>
+            </a:r>
+          </a:p>
           <a:p>
             <a:pPr algn="l">
               <a:spcAft>
@@ -7530,88 +7060,19 @@
               </a:spcAft>
             </a:pPr>
             <a:r>
-              <a:rPr sz="1600" b="1">
-                <a:solidFill>
-                  <a:srgbClr val="B39DDB"/>
+              <a:rPr sz="1600" b="0">
+                <a:solidFill>
+                  <a:srgbClr val="FFFFFF"/>
                 </a:solidFill>
                 <a:latin typeface="Sarabun"/>
                 <a:ea typeface="Sarabun"/>
                 <a:cs typeface="Sarabun"/>
               </a:rPr>
-              <a:t>2. รับ / ปฏิเสธ</a:t>
-            </a:r>
-          </a:p>
-        </p:txBody>
-      </p:sp>
-      <p:sp>
-        <p:nvSpPr>
-          <p:cNvPr id="12" name="Rectangle 11"/>
-          <p:cNvSpPr/>
-          <p:nvPr/>
-        </p:nvSpPr>
-        <p:spPr>
-          <a:xfrm>
-            <a:off x="4298950" y="2834283"/>
-            <a:ext cx="3594100" cy="1316433"/>
-          </a:xfrm>
-          <a:prstGeom prst="rect">
-            <a:avLst/>
-          </a:prstGeom>
-          <a:solidFill>
-            <a:srgbClr val="444444"/>
-          </a:solidFill>
-          <a:ln>
-            <a:noFill/>
-          </a:ln>
-          <a:effectLst/>
-        </p:spPr>
-        <p:style>
-          <a:lnRef idx="1">
-            <a:schemeClr val="accent1"/>
-          </a:lnRef>
-          <a:fillRef idx="3">
-            <a:schemeClr val="accent1"/>
-          </a:fillRef>
-          <a:effectRef idx="2">
-            <a:schemeClr val="accent1"/>
-          </a:effectRef>
-          <a:fontRef idx="minor">
-            <a:schemeClr val="lt1"/>
-          </a:fontRef>
-        </p:style>
-        <p:txBody>
-          <a:bodyPr rtlCol="0" anchor="ctr"/>
-          <a:lstStyle/>
-          <a:p>
-            <a:pPr algn="ctr"/>
-          </a:p>
-        </p:txBody>
-      </p:sp>
-      <p:pic>
-        <p:nvPicPr>
-          <p:cNvPr id="13" name="Picture 12" descr="pending_dialog.png"/>
-          <p:cNvPicPr>
-            <a:picLocks noChangeAspect="1"/>
-          </p:cNvPicPr>
-          <p:nvPr/>
-        </p:nvPicPr>
-        <p:blipFill>
-          <a:blip r:embed="rId4"/>
-          <a:srcRect/>
-          <a:stretch>
-            <a:fillRect/>
-          </a:stretch>
-        </p:blipFill>
-        <p:spPr>
-          <a:xfrm>
-            <a:off x="4318000" y="2853333"/>
-            <a:ext cx="3556000" cy="1278333"/>
-          </a:xfrm>
-          <a:prstGeom prst="rect">
-            <a:avLst/>
-          </a:prstGeom>
-        </p:spPr>
-      </p:pic>
+              <a:t>• ย้ายฐานข้อมูล: แก้ที่ repository/ ที่เดียว</a:t>
+            </a:r>
+          </a:p>
+        </p:txBody>
+      </p:sp>
       <p:sp>
         <p:nvSpPr>
           <p:cNvPr id="14" name="TextBox 13"/>
@@ -7620,49 +7081,8 @@
         </p:nvSpPr>
         <p:spPr>
           <a:xfrm>
-            <a:off x="4318000" y="5181600"/>
-            <a:ext cx="3556000" cy="558800"/>
-          </a:xfrm>
-          <a:prstGeom prst="rect">
-            <a:avLst/>
-          </a:prstGeom>
-          <a:noFill/>
-        </p:spPr>
-        <p:txBody>
-          <a:bodyPr wrap="square" anchor="t" lIns="50800" rIns="50800" tIns="25400" bIns="25400">
-            <a:spAutoFit/>
-          </a:bodyPr>
-          <a:lstStyle/>
-          <a:p>
-            <a:pPr algn="ctr">
-              <a:spcAft>
-                <a:spcPts val="600"/>
-              </a:spcAft>
-            </a:pPr>
-            <a:r>
-              <a:rPr sz="1400" b="0">
-                <a:solidFill>
-                  <a:srgbClr val="A6A6A6"/>
-                </a:solidFill>
-                <a:latin typeface="Sarabun"/>
-                <a:ea typeface="Sarabun"/>
-                <a:cs typeface="Sarabun"/>
-              </a:rPr>
-              <a:t>popup คดีรอตอบรับ: accept() · decline()</a:t>
-            </a:r>
-          </a:p>
-        </p:txBody>
-      </p:sp>
-      <p:sp>
-        <p:nvSpPr>
-          <p:cNvPr id="15" name="TextBox 14"/>
-          <p:cNvSpPr txBox="1"/>
-          <p:nvPr/>
-        </p:nvSpPr>
-        <p:spPr>
-          <a:xfrm>
-            <a:off x="8128000" y="1498600"/>
-            <a:ext cx="3556000" cy="330200"/>
+            <a:off x="508000" y="6070600"/>
+            <a:ext cx="11176000" cy="279400"/>
           </a:xfrm>
           <a:prstGeom prst="rect">
             <a:avLst/>
@@ -7681,166 +7101,15 @@
               </a:spcAft>
             </a:pPr>
             <a:r>
-              <a:rPr sz="1600" b="1">
-                <a:solidFill>
-                  <a:srgbClr val="B39DDB"/>
+              <a:rPr sz="1200" b="0">
+                <a:solidFill>
+                  <a:srgbClr val="A6A6A6"/>
                 </a:solidFill>
                 <a:latin typeface="Sarabun"/>
                 <a:ea typeface="Sarabun"/>
                 <a:cs typeface="Sarabun"/>
               </a:rPr>
-              <a:t>3. นัด · เลื่อนสถานะ · ขอถอนตัว</a:t>
-            </a:r>
-          </a:p>
-        </p:txBody>
-      </p:sp>
-      <p:sp>
-        <p:nvSpPr>
-          <p:cNvPr id="16" name="Rectangle 15"/>
-          <p:cNvSpPr/>
-          <p:nvPr/>
-        </p:nvSpPr>
-        <p:spPr>
-          <a:xfrm>
-            <a:off x="8108950" y="2190392"/>
-            <a:ext cx="3594100" cy="2604214"/>
-          </a:xfrm>
-          <a:prstGeom prst="rect">
-            <a:avLst/>
-          </a:prstGeom>
-          <a:solidFill>
-            <a:srgbClr val="444444"/>
-          </a:solidFill>
-          <a:ln>
-            <a:noFill/>
-          </a:ln>
-          <a:effectLst/>
-        </p:spPr>
-        <p:style>
-          <a:lnRef idx="1">
-            <a:schemeClr val="accent1"/>
-          </a:lnRef>
-          <a:fillRef idx="3">
-            <a:schemeClr val="accent1"/>
-          </a:fillRef>
-          <a:effectRef idx="2">
-            <a:schemeClr val="accent1"/>
-          </a:effectRef>
-          <a:fontRef idx="minor">
-            <a:schemeClr val="lt1"/>
-          </a:fontRef>
-        </p:style>
-        <p:txBody>
-          <a:bodyPr rtlCol="0" anchor="ctr"/>
-          <a:lstStyle/>
-          <a:p>
-            <a:pPr algn="ctr"/>
-          </a:p>
-        </p:txBody>
-      </p:sp>
-      <p:pic>
-        <p:nvPicPr>
-          <p:cNvPr id="17" name="Picture 16" descr="case_detail.png"/>
-          <p:cNvPicPr>
-            <a:picLocks noChangeAspect="1"/>
-          </p:cNvPicPr>
-          <p:nvPr/>
-        </p:nvPicPr>
-        <p:blipFill>
-          <a:blip r:embed="rId5"/>
-          <a:srcRect b="35000"/>
-          <a:stretch>
-            <a:fillRect/>
-          </a:stretch>
-        </p:blipFill>
-        <p:spPr>
-          <a:xfrm>
-            <a:off x="8128000" y="2209442"/>
-            <a:ext cx="3556000" cy="2566114"/>
-          </a:xfrm>
-          <a:prstGeom prst="rect">
-            <a:avLst/>
-          </a:prstGeom>
-        </p:spPr>
-      </p:pic>
-      <p:sp>
-        <p:nvSpPr>
-          <p:cNvPr id="18" name="TextBox 17"/>
-          <p:cNvSpPr txBox="1"/>
-          <p:nvPr/>
-        </p:nvSpPr>
-        <p:spPr>
-          <a:xfrm>
-            <a:off x="8128000" y="5181600"/>
-            <a:ext cx="3556000" cy="558800"/>
-          </a:xfrm>
-          <a:prstGeom prst="rect">
-            <a:avLst/>
-          </a:prstGeom>
-          <a:noFill/>
-        </p:spPr>
-        <p:txBody>
-          <a:bodyPr wrap="square" anchor="t" lIns="50800" rIns="50800" tIns="25400" bIns="25400">
-            <a:spAutoFit/>
-          </a:bodyPr>
-          <a:lstStyle/>
-          <a:p>
-            <a:pPr algn="ctr">
-              <a:spcAft>
-                <a:spcPts val="600"/>
-              </a:spcAft>
-            </a:pPr>
-            <a:r>
-              <a:rPr sz="1400" b="0">
-                <a:solidFill>
-                  <a:srgbClr val="A6A6A6"/>
-                </a:solidFill>
-                <a:latin typeface="Sarabun"/>
-                <a:ea typeface="Sarabun"/>
-                <a:cs typeface="Sarabun"/>
-              </a:rPr>
-              <a:t>หน้าคดีหลังทนายรับงาน</a:t>
-            </a:r>
-          </a:p>
-        </p:txBody>
-      </p:sp>
-      <p:sp>
-        <p:nvSpPr>
-          <p:cNvPr id="19" name="TextBox 18"/>
-          <p:cNvSpPr txBox="1"/>
-          <p:nvPr/>
-        </p:nvSpPr>
-        <p:spPr>
-          <a:xfrm>
-            <a:off x="508000" y="6070600"/>
-            <a:ext cx="11176000" cy="279400"/>
-          </a:xfrm>
-          <a:prstGeom prst="rect">
-            <a:avLst/>
-          </a:prstGeom>
-          <a:noFill/>
-        </p:spPr>
-        <p:txBody>
-          <a:bodyPr wrap="square" anchor="t" lIns="50800" rIns="50800" tIns="25400" bIns="25400">
-            <a:spAutoFit/>
-          </a:bodyPr>
-          <a:lstStyle/>
-          <a:p>
-            <a:pPr algn="l">
-              <a:spcAft>
-                <a:spcPts val="600"/>
-              </a:spcAft>
-            </a:pPr>
-            <a:r>
-              <a:rPr sz="1200" b="0">
-                <a:solidFill>
-                  <a:srgbClr val="A6A6A6"/>
-                </a:solidFill>
-                <a:latin typeface="Sarabun"/>
-                <a:ea typeface="Sarabun"/>
-                <a:cs typeface="Sarabun"/>
-              </a:rPr>
-              <a:t>ภาพจาก http://localhost:8000 (ข้อมูล seed) · manager1 และ lawyer1</a:t>
+              <a:t>อ้างอิง: repository/case_repo.py · repository/user_repo.py</a:t>
             </a:r>
           </a:p>
         </p:txBody>
@@ -7854,6 +7123,737 @@
 </file>
 
 <file path=ppt/slides/slide18.xml><?xml version="1.0" encoding="utf-8"?>
+<p:sld xmlns:a="http://schemas.openxmlformats.org/drawingml/2006/main" xmlns:p="http://schemas.openxmlformats.org/presentationml/2006/main" xmlns:r="http://schemas.openxmlformats.org/officeDocument/2006/relationships">
+  <p:cSld>
+    <p:bg>
+      <p:bgPr>
+        <a:solidFill>
+          <a:srgbClr val="1E1E1E"/>
+        </a:solidFill>
+        <a:effectLst/>
+      </p:bgPr>
+    </p:bg>
+    <p:spTree>
+      <p:nvGrpSpPr>
+        <p:cNvPr id="1" name=""/>
+        <p:cNvGrpSpPr/>
+        <p:nvPr/>
+      </p:nvGrpSpPr>
+      <p:grpSpPr/>
+      <p:sp>
+        <p:nvSpPr>
+          <p:cNvPr id="2" name="TextBox 1"/>
+          <p:cNvSpPr txBox="1"/>
+          <p:nvPr/>
+        </p:nvSpPr>
+        <p:spPr>
+          <a:xfrm>
+            <a:off x="508000" y="330200"/>
+            <a:ext cx="10414000" cy="558800"/>
+          </a:xfrm>
+          <a:prstGeom prst="rect">
+            <a:avLst/>
+          </a:prstGeom>
+          <a:noFill/>
+        </p:spPr>
+        <p:txBody>
+          <a:bodyPr wrap="square" anchor="t" lIns="50800" rIns="50800" tIns="25400" bIns="25400">
+            <a:spAutoFit/>
+          </a:bodyPr>
+          <a:lstStyle/>
+          <a:p>
+            <a:pPr algn="l">
+              <a:spcAft>
+                <a:spcPts val="600"/>
+              </a:spcAft>
+            </a:pPr>
+            <a:r>
+              <a:rPr sz="2800" b="1">
+                <a:solidFill>
+                  <a:srgbClr val="FFFFFF"/>
+                </a:solidFill>
+                <a:latin typeface="Sarabun"/>
+                <a:ea typeface="Sarabun"/>
+                <a:cs typeface="Sarabun"/>
+              </a:rPr>
+              <a:t>flow เดียวกันบนหน้าจอจริง</a:t>
+            </a:r>
+          </a:p>
+        </p:txBody>
+      </p:sp>
+      <p:sp>
+        <p:nvSpPr>
+          <p:cNvPr id="3" name="TextBox 2"/>
+          <p:cNvSpPr txBox="1"/>
+          <p:nvPr/>
+        </p:nvSpPr>
+        <p:spPr>
+          <a:xfrm>
+            <a:off x="508000" y="863600"/>
+            <a:ext cx="10922000" cy="330200"/>
+          </a:xfrm>
+          <a:prstGeom prst="rect">
+            <a:avLst/>
+          </a:prstGeom>
+          <a:noFill/>
+        </p:spPr>
+        <p:txBody>
+          <a:bodyPr wrap="square" anchor="t" lIns="50800" rIns="50800" tIns="25400" bIns="25400">
+            <a:spAutoFit/>
+          </a:bodyPr>
+          <a:lstStyle/>
+          <a:p>
+            <a:pPr algn="l">
+              <a:spcAft>
+                <a:spcPts val="600"/>
+              </a:spcAft>
+            </a:pPr>
+            <a:r>
+              <a:rPr sz="1500" b="0">
+                <a:solidFill>
+                  <a:srgbClr val="A6A6A6"/>
+                </a:solidFill>
+                <a:latin typeface="Sarabun"/>
+                <a:ea typeface="Sarabun"/>
+                <a:cs typeface="Sarabun"/>
+              </a:rPr>
+              <a:t>มอบหมาย → รับ / ปฏิเสธ → จัดการคดี</a:t>
+            </a:r>
+          </a:p>
+        </p:txBody>
+      </p:sp>
+      <p:sp>
+        <p:nvSpPr>
+          <p:cNvPr id="4" name="Rectangle 3"/>
+          <p:cNvSpPr/>
+          <p:nvPr/>
+        </p:nvSpPr>
+        <p:spPr>
+          <a:xfrm>
+            <a:off x="508000" y="1295400"/>
+            <a:ext cx="11176000" cy="19050"/>
+          </a:xfrm>
+          <a:prstGeom prst="rect">
+            <a:avLst/>
+          </a:prstGeom>
+          <a:solidFill>
+            <a:srgbClr val="444444"/>
+          </a:solidFill>
+          <a:ln>
+            <a:noFill/>
+          </a:ln>
+          <a:effectLst/>
+        </p:spPr>
+        <p:style>
+          <a:lnRef idx="1">
+            <a:schemeClr val="accent1"/>
+          </a:lnRef>
+          <a:fillRef idx="3">
+            <a:schemeClr val="accent1"/>
+          </a:fillRef>
+          <a:effectRef idx="2">
+            <a:schemeClr val="accent1"/>
+          </a:effectRef>
+          <a:fontRef idx="minor">
+            <a:schemeClr val="lt1"/>
+          </a:fontRef>
+        </p:style>
+        <p:txBody>
+          <a:bodyPr rtlCol="0" anchor="ctr"/>
+          <a:lstStyle/>
+          <a:p>
+            <a:pPr algn="ctr"/>
+          </a:p>
+        </p:txBody>
+      </p:sp>
+      <p:sp>
+        <p:nvSpPr>
+          <p:cNvPr id="5" name="Rectangle 4"/>
+          <p:cNvSpPr/>
+          <p:nvPr/>
+        </p:nvSpPr>
+        <p:spPr>
+          <a:xfrm>
+            <a:off x="508000" y="1282700"/>
+            <a:ext cx="1016000" cy="38100"/>
+          </a:xfrm>
+          <a:prstGeom prst="rect">
+            <a:avLst/>
+          </a:prstGeom>
+          <a:solidFill>
+            <a:srgbClr val="B39DDB"/>
+          </a:solidFill>
+          <a:ln>
+            <a:noFill/>
+          </a:ln>
+          <a:effectLst/>
+        </p:spPr>
+        <p:style>
+          <a:lnRef idx="1">
+            <a:schemeClr val="accent1"/>
+          </a:lnRef>
+          <a:fillRef idx="3">
+            <a:schemeClr val="accent1"/>
+          </a:fillRef>
+          <a:effectRef idx="2">
+            <a:schemeClr val="accent1"/>
+          </a:effectRef>
+          <a:fontRef idx="minor">
+            <a:schemeClr val="lt1"/>
+          </a:fontRef>
+        </p:style>
+        <p:txBody>
+          <a:bodyPr rtlCol="0" anchor="ctr"/>
+          <a:lstStyle/>
+          <a:p>
+            <a:pPr algn="ctr"/>
+          </a:p>
+        </p:txBody>
+      </p:sp>
+      <p:sp>
+        <p:nvSpPr>
+          <p:cNvPr id="6" name="TextBox 5"/>
+          <p:cNvSpPr txBox="1"/>
+          <p:nvPr/>
+        </p:nvSpPr>
+        <p:spPr>
+          <a:xfrm>
+            <a:off x="10922000" y="355600"/>
+            <a:ext cx="762000" cy="381000"/>
+          </a:xfrm>
+          <a:prstGeom prst="rect">
+            <a:avLst/>
+          </a:prstGeom>
+          <a:noFill/>
+        </p:spPr>
+        <p:txBody>
+          <a:bodyPr wrap="square" anchor="t" lIns="50800" rIns="50800" tIns="25400" bIns="25400">
+            <a:spAutoFit/>
+          </a:bodyPr>
+          <a:lstStyle/>
+          <a:p>
+            <a:pPr algn="r">
+              <a:spcAft>
+                <a:spcPts val="600"/>
+              </a:spcAft>
+            </a:pPr>
+            <a:r>
+              <a:rPr sz="1400" b="0">
+                <a:solidFill>
+                  <a:srgbClr val="A6A6A6"/>
+                </a:solidFill>
+                <a:latin typeface="Sarabun"/>
+                <a:ea typeface="Sarabun"/>
+                <a:cs typeface="Sarabun"/>
+              </a:rPr>
+              <a:t>B4</a:t>
+            </a:r>
+          </a:p>
+        </p:txBody>
+      </p:sp>
+      <p:sp>
+        <p:nvSpPr>
+          <p:cNvPr id="7" name="TextBox 6"/>
+          <p:cNvSpPr txBox="1"/>
+          <p:nvPr/>
+        </p:nvSpPr>
+        <p:spPr>
+          <a:xfrm>
+            <a:off x="508000" y="1498600"/>
+            <a:ext cx="3556000" cy="330200"/>
+          </a:xfrm>
+          <a:prstGeom prst="rect">
+            <a:avLst/>
+          </a:prstGeom>
+          <a:noFill/>
+        </p:spPr>
+        <p:txBody>
+          <a:bodyPr wrap="square" anchor="t" lIns="50800" rIns="50800" tIns="25400" bIns="25400">
+            <a:spAutoFit/>
+          </a:bodyPr>
+          <a:lstStyle/>
+          <a:p>
+            <a:pPr algn="l">
+              <a:spcAft>
+                <a:spcPts val="600"/>
+              </a:spcAft>
+            </a:pPr>
+            <a:r>
+              <a:rPr sz="1600" b="1">
+                <a:solidFill>
+                  <a:srgbClr val="B39DDB"/>
+                </a:solidFill>
+                <a:latin typeface="Sarabun"/>
+                <a:ea typeface="Sarabun"/>
+                <a:cs typeface="Sarabun"/>
+              </a:rPr>
+              <a:t>1. มอบหมายทนาย</a:t>
+            </a:r>
+          </a:p>
+        </p:txBody>
+      </p:sp>
+      <p:sp>
+        <p:nvSpPr>
+          <p:cNvPr id="8" name="Rectangle 7"/>
+          <p:cNvSpPr/>
+          <p:nvPr/>
+        </p:nvSpPr>
+        <p:spPr>
+          <a:xfrm>
+            <a:off x="488950" y="2286171"/>
+            <a:ext cx="3594100" cy="2412657"/>
+          </a:xfrm>
+          <a:prstGeom prst="rect">
+            <a:avLst/>
+          </a:prstGeom>
+          <a:solidFill>
+            <a:srgbClr val="444444"/>
+          </a:solidFill>
+          <a:ln>
+            <a:noFill/>
+          </a:ln>
+          <a:effectLst/>
+        </p:spPr>
+        <p:style>
+          <a:lnRef idx="1">
+            <a:schemeClr val="accent1"/>
+          </a:lnRef>
+          <a:fillRef idx="3">
+            <a:schemeClr val="accent1"/>
+          </a:fillRef>
+          <a:effectRef idx="2">
+            <a:schemeClr val="accent1"/>
+          </a:effectRef>
+          <a:fontRef idx="minor">
+            <a:schemeClr val="lt1"/>
+          </a:fontRef>
+        </p:style>
+        <p:txBody>
+          <a:bodyPr rtlCol="0" anchor="ctr"/>
+          <a:lstStyle/>
+          <a:p>
+            <a:pPr algn="ctr"/>
+          </a:p>
+        </p:txBody>
+      </p:sp>
+      <p:pic>
+        <p:nvPicPr>
+          <p:cNvPr id="9" name="Picture 8" descr="manager_assign.png"/>
+          <p:cNvPicPr>
+            <a:picLocks noChangeAspect="1"/>
+          </p:cNvPicPr>
+          <p:nvPr/>
+        </p:nvPicPr>
+        <p:blipFill>
+          <a:blip r:embed="rId3"/>
+          <a:srcRect b="20000"/>
+          <a:stretch>
+            <a:fillRect/>
+          </a:stretch>
+        </p:blipFill>
+        <p:spPr>
+          <a:xfrm>
+            <a:off x="508000" y="2305221"/>
+            <a:ext cx="3556000" cy="2374557"/>
+          </a:xfrm>
+          <a:prstGeom prst="rect">
+            <a:avLst/>
+          </a:prstGeom>
+        </p:spPr>
+      </p:pic>
+      <p:sp>
+        <p:nvSpPr>
+          <p:cNvPr id="10" name="TextBox 9"/>
+          <p:cNvSpPr txBox="1"/>
+          <p:nvPr/>
+        </p:nvSpPr>
+        <p:spPr>
+          <a:xfrm>
+            <a:off x="508000" y="5181600"/>
+            <a:ext cx="3556000" cy="558800"/>
+          </a:xfrm>
+          <a:prstGeom prst="rect">
+            <a:avLst/>
+          </a:prstGeom>
+          <a:noFill/>
+        </p:spPr>
+        <p:txBody>
+          <a:bodyPr wrap="square" anchor="t" lIns="50800" rIns="50800" tIns="25400" bIns="25400">
+            <a:spAutoFit/>
+          </a:bodyPr>
+          <a:lstStyle/>
+          <a:p>
+            <a:pPr algn="ctr">
+              <a:spcAft>
+                <a:spcPts val="600"/>
+              </a:spcAft>
+            </a:pPr>
+            <a:r>
+              <a:rPr sz="1400" b="0">
+                <a:solidFill>
+                  <a:srgbClr val="A6A6A6"/>
+                </a:solidFill>
+                <a:latin typeface="Sarabun"/>
+                <a:ea typeface="Sarabun"/>
+                <a:cs typeface="Sarabun"/>
+              </a:rPr>
+              <a:t>ผู้จัดการเห็นภาระงานทุกคนก่อนเลือก</a:t>
+            </a:r>
+          </a:p>
+        </p:txBody>
+      </p:sp>
+      <p:sp>
+        <p:nvSpPr>
+          <p:cNvPr id="11" name="TextBox 10"/>
+          <p:cNvSpPr txBox="1"/>
+          <p:nvPr/>
+        </p:nvSpPr>
+        <p:spPr>
+          <a:xfrm>
+            <a:off x="4318000" y="1498600"/>
+            <a:ext cx="3556000" cy="330200"/>
+          </a:xfrm>
+          <a:prstGeom prst="rect">
+            <a:avLst/>
+          </a:prstGeom>
+          <a:noFill/>
+        </p:spPr>
+        <p:txBody>
+          <a:bodyPr wrap="square" anchor="t" lIns="50800" rIns="50800" tIns="25400" bIns="25400">
+            <a:spAutoFit/>
+          </a:bodyPr>
+          <a:lstStyle/>
+          <a:p>
+            <a:pPr algn="l">
+              <a:spcAft>
+                <a:spcPts val="600"/>
+              </a:spcAft>
+            </a:pPr>
+            <a:r>
+              <a:rPr sz="1600" b="1">
+                <a:solidFill>
+                  <a:srgbClr val="B39DDB"/>
+                </a:solidFill>
+                <a:latin typeface="Sarabun"/>
+                <a:ea typeface="Sarabun"/>
+                <a:cs typeface="Sarabun"/>
+              </a:rPr>
+              <a:t>2. รับ / ปฏิเสธ</a:t>
+            </a:r>
+          </a:p>
+        </p:txBody>
+      </p:sp>
+      <p:sp>
+        <p:nvSpPr>
+          <p:cNvPr id="12" name="Rectangle 11"/>
+          <p:cNvSpPr/>
+          <p:nvPr/>
+        </p:nvSpPr>
+        <p:spPr>
+          <a:xfrm>
+            <a:off x="4298950" y="2834283"/>
+            <a:ext cx="3594100" cy="1316433"/>
+          </a:xfrm>
+          <a:prstGeom prst="rect">
+            <a:avLst/>
+          </a:prstGeom>
+          <a:solidFill>
+            <a:srgbClr val="444444"/>
+          </a:solidFill>
+          <a:ln>
+            <a:noFill/>
+          </a:ln>
+          <a:effectLst/>
+        </p:spPr>
+        <p:style>
+          <a:lnRef idx="1">
+            <a:schemeClr val="accent1"/>
+          </a:lnRef>
+          <a:fillRef idx="3">
+            <a:schemeClr val="accent1"/>
+          </a:fillRef>
+          <a:effectRef idx="2">
+            <a:schemeClr val="accent1"/>
+          </a:effectRef>
+          <a:fontRef idx="minor">
+            <a:schemeClr val="lt1"/>
+          </a:fontRef>
+        </p:style>
+        <p:txBody>
+          <a:bodyPr rtlCol="0" anchor="ctr"/>
+          <a:lstStyle/>
+          <a:p>
+            <a:pPr algn="ctr"/>
+          </a:p>
+        </p:txBody>
+      </p:sp>
+      <p:pic>
+        <p:nvPicPr>
+          <p:cNvPr id="13" name="Picture 12" descr="pending_dialog.png"/>
+          <p:cNvPicPr>
+            <a:picLocks noChangeAspect="1"/>
+          </p:cNvPicPr>
+          <p:nvPr/>
+        </p:nvPicPr>
+        <p:blipFill>
+          <a:blip r:embed="rId4"/>
+          <a:srcRect/>
+          <a:stretch>
+            <a:fillRect/>
+          </a:stretch>
+        </p:blipFill>
+        <p:spPr>
+          <a:xfrm>
+            <a:off x="4318000" y="2853333"/>
+            <a:ext cx="3556000" cy="1278333"/>
+          </a:xfrm>
+          <a:prstGeom prst="rect">
+            <a:avLst/>
+          </a:prstGeom>
+        </p:spPr>
+      </p:pic>
+      <p:sp>
+        <p:nvSpPr>
+          <p:cNvPr id="14" name="TextBox 13"/>
+          <p:cNvSpPr txBox="1"/>
+          <p:nvPr/>
+        </p:nvSpPr>
+        <p:spPr>
+          <a:xfrm>
+            <a:off x="4318000" y="5181600"/>
+            <a:ext cx="3556000" cy="558800"/>
+          </a:xfrm>
+          <a:prstGeom prst="rect">
+            <a:avLst/>
+          </a:prstGeom>
+          <a:noFill/>
+        </p:spPr>
+        <p:txBody>
+          <a:bodyPr wrap="square" anchor="t" lIns="50800" rIns="50800" tIns="25400" bIns="25400">
+            <a:spAutoFit/>
+          </a:bodyPr>
+          <a:lstStyle/>
+          <a:p>
+            <a:pPr algn="ctr">
+              <a:spcAft>
+                <a:spcPts val="600"/>
+              </a:spcAft>
+            </a:pPr>
+            <a:r>
+              <a:rPr sz="1400" b="0">
+                <a:solidFill>
+                  <a:srgbClr val="A6A6A6"/>
+                </a:solidFill>
+                <a:latin typeface="Sarabun"/>
+                <a:ea typeface="Sarabun"/>
+                <a:cs typeface="Sarabun"/>
+              </a:rPr>
+              <a:t>popup คดีรอตอบรับ: accept() · decline()</a:t>
+            </a:r>
+          </a:p>
+        </p:txBody>
+      </p:sp>
+      <p:sp>
+        <p:nvSpPr>
+          <p:cNvPr id="15" name="TextBox 14"/>
+          <p:cNvSpPr txBox="1"/>
+          <p:nvPr/>
+        </p:nvSpPr>
+        <p:spPr>
+          <a:xfrm>
+            <a:off x="8128000" y="1498600"/>
+            <a:ext cx="3556000" cy="330200"/>
+          </a:xfrm>
+          <a:prstGeom prst="rect">
+            <a:avLst/>
+          </a:prstGeom>
+          <a:noFill/>
+        </p:spPr>
+        <p:txBody>
+          <a:bodyPr wrap="square" anchor="t" lIns="50800" rIns="50800" tIns="25400" bIns="25400">
+            <a:spAutoFit/>
+          </a:bodyPr>
+          <a:lstStyle/>
+          <a:p>
+            <a:pPr algn="l">
+              <a:spcAft>
+                <a:spcPts val="600"/>
+              </a:spcAft>
+            </a:pPr>
+            <a:r>
+              <a:rPr sz="1600" b="1">
+                <a:solidFill>
+                  <a:srgbClr val="B39DDB"/>
+                </a:solidFill>
+                <a:latin typeface="Sarabun"/>
+                <a:ea typeface="Sarabun"/>
+                <a:cs typeface="Sarabun"/>
+              </a:rPr>
+              <a:t>3. นัด · เลื่อนสถานะ · ขอถอนตัว</a:t>
+            </a:r>
+          </a:p>
+        </p:txBody>
+      </p:sp>
+      <p:sp>
+        <p:nvSpPr>
+          <p:cNvPr id="16" name="Rectangle 15"/>
+          <p:cNvSpPr/>
+          <p:nvPr/>
+        </p:nvSpPr>
+        <p:spPr>
+          <a:xfrm>
+            <a:off x="8108950" y="2190392"/>
+            <a:ext cx="3594100" cy="2604214"/>
+          </a:xfrm>
+          <a:prstGeom prst="rect">
+            <a:avLst/>
+          </a:prstGeom>
+          <a:solidFill>
+            <a:srgbClr val="444444"/>
+          </a:solidFill>
+          <a:ln>
+            <a:noFill/>
+          </a:ln>
+          <a:effectLst/>
+        </p:spPr>
+        <p:style>
+          <a:lnRef idx="1">
+            <a:schemeClr val="accent1"/>
+          </a:lnRef>
+          <a:fillRef idx="3">
+            <a:schemeClr val="accent1"/>
+          </a:fillRef>
+          <a:effectRef idx="2">
+            <a:schemeClr val="accent1"/>
+          </a:effectRef>
+          <a:fontRef idx="minor">
+            <a:schemeClr val="lt1"/>
+          </a:fontRef>
+        </p:style>
+        <p:txBody>
+          <a:bodyPr rtlCol="0" anchor="ctr"/>
+          <a:lstStyle/>
+          <a:p>
+            <a:pPr algn="ctr"/>
+          </a:p>
+        </p:txBody>
+      </p:sp>
+      <p:pic>
+        <p:nvPicPr>
+          <p:cNvPr id="17" name="Picture 16" descr="case_detail.png"/>
+          <p:cNvPicPr>
+            <a:picLocks noChangeAspect="1"/>
+          </p:cNvPicPr>
+          <p:nvPr/>
+        </p:nvPicPr>
+        <p:blipFill>
+          <a:blip r:embed="rId5"/>
+          <a:srcRect b="35000"/>
+          <a:stretch>
+            <a:fillRect/>
+          </a:stretch>
+        </p:blipFill>
+        <p:spPr>
+          <a:xfrm>
+            <a:off x="8128000" y="2209442"/>
+            <a:ext cx="3556000" cy="2566114"/>
+          </a:xfrm>
+          <a:prstGeom prst="rect">
+            <a:avLst/>
+          </a:prstGeom>
+        </p:spPr>
+      </p:pic>
+      <p:sp>
+        <p:nvSpPr>
+          <p:cNvPr id="18" name="TextBox 17"/>
+          <p:cNvSpPr txBox="1"/>
+          <p:nvPr/>
+        </p:nvSpPr>
+        <p:spPr>
+          <a:xfrm>
+            <a:off x="8128000" y="5181600"/>
+            <a:ext cx="3556000" cy="558800"/>
+          </a:xfrm>
+          <a:prstGeom prst="rect">
+            <a:avLst/>
+          </a:prstGeom>
+          <a:noFill/>
+        </p:spPr>
+        <p:txBody>
+          <a:bodyPr wrap="square" anchor="t" lIns="50800" rIns="50800" tIns="25400" bIns="25400">
+            <a:spAutoFit/>
+          </a:bodyPr>
+          <a:lstStyle/>
+          <a:p>
+            <a:pPr algn="ctr">
+              <a:spcAft>
+                <a:spcPts val="600"/>
+              </a:spcAft>
+            </a:pPr>
+            <a:r>
+              <a:rPr sz="1400" b="0">
+                <a:solidFill>
+                  <a:srgbClr val="A6A6A6"/>
+                </a:solidFill>
+                <a:latin typeface="Sarabun"/>
+                <a:ea typeface="Sarabun"/>
+                <a:cs typeface="Sarabun"/>
+              </a:rPr>
+              <a:t>หน้าคดีหลังทนายรับงาน</a:t>
+            </a:r>
+          </a:p>
+        </p:txBody>
+      </p:sp>
+      <p:sp>
+        <p:nvSpPr>
+          <p:cNvPr id="19" name="TextBox 18"/>
+          <p:cNvSpPr txBox="1"/>
+          <p:nvPr/>
+        </p:nvSpPr>
+        <p:spPr>
+          <a:xfrm>
+            <a:off x="508000" y="6070600"/>
+            <a:ext cx="11176000" cy="279400"/>
+          </a:xfrm>
+          <a:prstGeom prst="rect">
+            <a:avLst/>
+          </a:prstGeom>
+          <a:noFill/>
+        </p:spPr>
+        <p:txBody>
+          <a:bodyPr wrap="square" anchor="t" lIns="50800" rIns="50800" tIns="25400" bIns="25400">
+            <a:spAutoFit/>
+          </a:bodyPr>
+          <a:lstStyle/>
+          <a:p>
+            <a:pPr algn="l">
+              <a:spcAft>
+                <a:spcPts val="600"/>
+              </a:spcAft>
+            </a:pPr>
+            <a:r>
+              <a:rPr sz="1200" b="0">
+                <a:solidFill>
+                  <a:srgbClr val="A6A6A6"/>
+                </a:solidFill>
+                <a:latin typeface="Sarabun"/>
+                <a:ea typeface="Sarabun"/>
+                <a:cs typeface="Sarabun"/>
+              </a:rPr>
+              <a:t>ภาพจาก http://localhost:8000 (ข้อมูล seed) · manager1 และ lawyer1</a:t>
+            </a:r>
+          </a:p>
+        </p:txBody>
+      </p:sp>
+    </p:spTree>
+  </p:cSld>
+  <p:clrMapOvr>
+    <a:masterClrMapping/>
+  </p:clrMapOvr>
+</p:sld>
+</file>
+
+<file path=ppt/slides/slide19.xml><?xml version="1.0" encoding="utf-8"?>
 <p:sld xmlns:a="http://schemas.openxmlformats.org/drawingml/2006/main" xmlns:p="http://schemas.openxmlformats.org/presentationml/2006/main" xmlns:r="http://schemas.openxmlformats.org/officeDocument/2006/relationships">
   <p:cSld>
     <p:bg>
@@ -8952,7 +8952,7 @@
 </p:sld>
 </file>
 
-<file path=ppt/slides/slide19.xml><?xml version="1.0" encoding="utf-8"?>
+<file path=ppt/slides/slide20.xml><?xml version="1.0" encoding="utf-8"?>
 <p:sld xmlns:a="http://schemas.openxmlformats.org/drawingml/2006/main" xmlns:p="http://schemas.openxmlformats.org/presentationml/2006/main" xmlns:r="http://schemas.openxmlformats.org/officeDocument/2006/relationships">
   <p:cSld>
     <p:bg>
@@ -10024,7 +10024,7 @@
 </p:sld>
 </file>
 
-<file path=ppt/slides/slide20.xml><?xml version="1.0" encoding="utf-8"?>
+<file path=ppt/slides/slide21.xml><?xml version="1.0" encoding="utf-8"?>
 <p:sld xmlns:a="http://schemas.openxmlformats.org/drawingml/2006/main" xmlns:p="http://schemas.openxmlformats.org/presentationml/2006/main" xmlns:r="http://schemas.openxmlformats.org/officeDocument/2006/relationships">
   <p:cSld>
     <p:bg>
